--- a/Advanced Reactor Materials/Fall2026/Lec1_intro.pptx
+++ b/Advanced Reactor Materials/Fall2026/Lec1_intro.pptx
@@ -6,7 +6,7 @@
     <p:sldMasterId id="2147483684" r:id="rId2"/>
   </p:sldMasterIdLst>
   <p:notesMasterIdLst>
-    <p:notesMasterId r:id="rId23"/>
+    <p:notesMasterId r:id="rId25"/>
   </p:notesMasterIdLst>
   <p:sldIdLst>
     <p:sldId id="256" r:id="rId3"/>
@@ -17,18 +17,20 @@
     <p:sldId id="409" r:id="rId8"/>
     <p:sldId id="407" r:id="rId9"/>
     <p:sldId id="415" r:id="rId10"/>
-    <p:sldId id="397" r:id="rId11"/>
-    <p:sldId id="400" r:id="rId12"/>
-    <p:sldId id="399" r:id="rId13"/>
-    <p:sldId id="404" r:id="rId14"/>
-    <p:sldId id="401" r:id="rId15"/>
-    <p:sldId id="412" r:id="rId16"/>
-    <p:sldId id="403" r:id="rId17"/>
-    <p:sldId id="402" r:id="rId18"/>
-    <p:sldId id="413" r:id="rId19"/>
-    <p:sldId id="405" r:id="rId20"/>
-    <p:sldId id="406" r:id="rId21"/>
-    <p:sldId id="395" r:id="rId22"/>
+    <p:sldId id="416" r:id="rId11"/>
+    <p:sldId id="397" r:id="rId12"/>
+    <p:sldId id="400" r:id="rId13"/>
+    <p:sldId id="399" r:id="rId14"/>
+    <p:sldId id="404" r:id="rId15"/>
+    <p:sldId id="401" r:id="rId16"/>
+    <p:sldId id="412" r:id="rId17"/>
+    <p:sldId id="403" r:id="rId18"/>
+    <p:sldId id="402" r:id="rId19"/>
+    <p:sldId id="413" r:id="rId20"/>
+    <p:sldId id="405" r:id="rId21"/>
+    <p:sldId id="406" r:id="rId22"/>
+    <p:sldId id="417" r:id="rId23"/>
+    <p:sldId id="395" r:id="rId24"/>
   </p:sldIdLst>
   <p:sldSz cx="12192000" cy="6858000"/>
   <p:notesSz cx="6858000" cy="9144000"/>
@@ -217,7 +219,7 @@
           <a:p>
             <a:fld id="{9CDED3EB-7982-1A47-94FE-5B03335DF28F}" type="datetimeFigureOut">
               <a:rPr lang="en-US" smtClean="0"/>
-              <a:t>8/17/26</a:t>
+              <a:t>8/18/26</a:t>
             </a:fld>
             <a:endParaRPr lang="en-US"/>
           </a:p>
@@ -631,7 +633,7 @@
           <a:p>
             <a:fld id="{8F26233B-545A-ED45-A58F-906A0CF9CD24}" type="datetime1">
               <a:rPr lang="en-US" smtClean="0"/>
-              <a:t>8/17/26</a:t>
+              <a:t>8/18/26</a:t>
             </a:fld>
             <a:endParaRPr lang="en-US"/>
           </a:p>
@@ -829,7 +831,7 @@
           <a:p>
             <a:fld id="{CDC00785-8829-1941-B374-7913FD522C4E}" type="datetime1">
               <a:rPr lang="en-US" smtClean="0"/>
-              <a:t>8/17/26</a:t>
+              <a:t>8/18/26</a:t>
             </a:fld>
             <a:endParaRPr lang="en-US"/>
           </a:p>
@@ -1037,7 +1039,7 @@
           <a:p>
             <a:fld id="{F1EEC331-E4FA-4E48-9694-87E4C0E26396}" type="datetime1">
               <a:rPr lang="en-US" smtClean="0"/>
-              <a:t>8/17/26</a:t>
+              <a:t>8/18/26</a:t>
             </a:fld>
             <a:endParaRPr lang="en-US"/>
           </a:p>
@@ -1298,7 +1300,7 @@
             </a:pPr>
             <a:fld id="{E03FD14D-963A-754D-86A1-8D677C531ED4}" type="datetime1">
               <a:rPr lang="en-US" smtClean="0"/>
-              <a:t>8/17/26</a:t>
+              <a:t>8/18/26</a:t>
             </a:fld>
             <a:endParaRPr lang="en-US"/>
           </a:p>
@@ -1497,7 +1499,7 @@
             </a:pPr>
             <a:fld id="{1749DAA9-2AE3-7446-97CA-5588AC038FDA}" type="datetime1">
               <a:rPr lang="en-US" smtClean="0"/>
-              <a:t>8/17/26</a:t>
+              <a:t>8/18/26</a:t>
             </a:fld>
             <a:endParaRPr lang="en-US"/>
           </a:p>
@@ -1767,7 +1769,7 @@
             </a:pPr>
             <a:fld id="{E432579F-21B4-B240-AD37-F26A2FE50C25}" type="datetime1">
               <a:rPr lang="en-US" smtClean="0"/>
-              <a:t>8/17/26</a:t>
+              <a:t>8/18/26</a:t>
             </a:fld>
             <a:endParaRPr lang="en-US"/>
           </a:p>
@@ -2078,7 +2080,7 @@
             </a:pPr>
             <a:fld id="{2EF55602-D25A-1C46-85C6-6E926C8B39C0}" type="datetime1">
               <a:rPr lang="en-US" smtClean="0"/>
-              <a:t>8/17/26</a:t>
+              <a:t>8/18/26</a:t>
             </a:fld>
             <a:endParaRPr lang="en-US"/>
           </a:p>
@@ -2398,7 +2400,7 @@
             </a:pPr>
             <a:fld id="{D24AA09B-6EE4-5A41-B01A-0B2EA2F56162}" type="datetime1">
               <a:rPr lang="en-US" smtClean="0"/>
-              <a:t>8/17/26</a:t>
+              <a:t>8/18/26</a:t>
             </a:fld>
             <a:endParaRPr lang="en-US"/>
           </a:p>
@@ -2539,7 +2541,7 @@
             </a:pPr>
             <a:fld id="{78F15382-4059-BA40-AB5F-E3F2CA0BBF74}" type="datetime1">
               <a:rPr lang="en-US" smtClean="0"/>
-              <a:t>8/17/26</a:t>
+              <a:t>8/18/26</a:t>
             </a:fld>
             <a:endParaRPr lang="en-US"/>
           </a:p>
@@ -2658,7 +2660,7 @@
             </a:pPr>
             <a:fld id="{3357C129-2241-544C-9C7B-9572E2192506}" type="datetime1">
               <a:rPr lang="en-US" smtClean="0"/>
-              <a:t>8/17/26</a:t>
+              <a:t>8/18/26</a:t>
             </a:fld>
             <a:endParaRPr lang="en-US"/>
           </a:p>
@@ -2957,7 +2959,7 @@
             </a:pPr>
             <a:fld id="{5F2E0329-25EC-CF48-85F8-C4161B106AB6}" type="datetime1">
               <a:rPr lang="en-US" smtClean="0"/>
-              <a:t>8/17/26</a:t>
+              <a:t>8/18/26</a:t>
             </a:fld>
             <a:endParaRPr lang="en-US"/>
           </a:p>
@@ -3160,7 +3162,7 @@
           <a:p>
             <a:fld id="{FAC48349-D4D1-0044-A547-FA21FE76B31B}" type="datetime1">
               <a:rPr lang="en-US" smtClean="0"/>
-              <a:t>8/17/26</a:t>
+              <a:t>8/18/26</a:t>
             </a:fld>
             <a:endParaRPr lang="en-US"/>
           </a:p>
@@ -3439,7 +3441,7 @@
             </a:pPr>
             <a:fld id="{94E36B3A-01B9-B740-B77D-B85A591E2048}" type="datetime1">
               <a:rPr lang="en-US" smtClean="0"/>
-              <a:t>8/17/26</a:t>
+              <a:t>8/18/26</a:t>
             </a:fld>
             <a:endParaRPr lang="en-US"/>
           </a:p>
@@ -3632,7 +3634,7 @@
             </a:pPr>
             <a:fld id="{556700CE-AB42-254B-B250-B0450F85CFBA}" type="datetime1">
               <a:rPr lang="en-US" smtClean="0"/>
-              <a:t>8/17/26</a:t>
+              <a:t>8/18/26</a:t>
             </a:fld>
             <a:endParaRPr lang="en-US"/>
           </a:p>
@@ -3834,7 +3836,7 @@
             </a:pPr>
             <a:fld id="{2F5ADB3B-1092-7C41-B925-2FBC4B857048}" type="datetime1">
               <a:rPr lang="en-US" smtClean="0"/>
-              <a:t>8/17/26</a:t>
+              <a:t>8/18/26</a:t>
             </a:fld>
             <a:endParaRPr lang="en-US"/>
           </a:p>
@@ -4114,7 +4116,7 @@
           <a:p>
             <a:fld id="{579D99B1-8879-6C42-9564-3A8E414C062D}" type="datetime1">
               <a:rPr lang="en-US" smtClean="0"/>
-              <a:t>8/17/26</a:t>
+              <a:t>8/18/26</a:t>
             </a:fld>
             <a:endParaRPr lang="en-US"/>
           </a:p>
@@ -4379,7 +4381,7 @@
           <a:p>
             <a:fld id="{88A2B43B-6094-AE4F-AD40-7E1E0BFCDC2E}" type="datetime1">
               <a:rPr lang="en-US" smtClean="0"/>
-              <a:t>8/17/26</a:t>
+              <a:t>8/18/26</a:t>
             </a:fld>
             <a:endParaRPr lang="en-US"/>
           </a:p>
@@ -4791,7 +4793,7 @@
           <a:p>
             <a:fld id="{1D173B7A-A6E5-654C-9529-39972D898641}" type="datetime1">
               <a:rPr lang="en-US" smtClean="0"/>
-              <a:t>8/17/26</a:t>
+              <a:t>8/18/26</a:t>
             </a:fld>
             <a:endParaRPr lang="en-US"/>
           </a:p>
@@ -4932,7 +4934,7 @@
           <a:p>
             <a:fld id="{FFFCCC14-E0BA-1648-B1FB-09BB6E2D3420}" type="datetime1">
               <a:rPr lang="en-US" smtClean="0"/>
-              <a:t>8/17/26</a:t>
+              <a:t>8/18/26</a:t>
             </a:fld>
             <a:endParaRPr lang="en-US"/>
           </a:p>
@@ -5045,7 +5047,7 @@
           <a:p>
             <a:fld id="{2AA1BC76-9A20-AE43-A0C3-CCB1F3D41949}" type="datetime1">
               <a:rPr lang="en-US" smtClean="0"/>
-              <a:t>8/17/26</a:t>
+              <a:t>8/18/26</a:t>
             </a:fld>
             <a:endParaRPr lang="en-US"/>
           </a:p>
@@ -5356,7 +5358,7 @@
           <a:p>
             <a:fld id="{80B1846B-8A97-9241-82FB-EF27668D4FE3}" type="datetime1">
               <a:rPr lang="en-US" smtClean="0"/>
-              <a:t>8/17/26</a:t>
+              <a:t>8/18/26</a:t>
             </a:fld>
             <a:endParaRPr lang="en-US"/>
           </a:p>
@@ -5644,7 +5646,7 @@
           <a:p>
             <a:fld id="{657C7D31-0545-FD4D-81B0-5B3447EF5C73}" type="datetime1">
               <a:rPr lang="en-US" smtClean="0"/>
-              <a:t>8/17/26</a:t>
+              <a:t>8/18/26</a:t>
             </a:fld>
             <a:endParaRPr lang="en-US"/>
           </a:p>
@@ -5885,7 +5887,7 @@
           <a:p>
             <a:fld id="{FE2FC56F-0D44-F647-9484-DD0583C22E9A}" type="datetime1">
               <a:rPr lang="en-US" smtClean="0"/>
-              <a:t>8/17/26</a:t>
+              <a:t>8/18/26</a:t>
             </a:fld>
             <a:endParaRPr lang="en-US"/>
           </a:p>
@@ -6513,7 +6515,7 @@
             </a:pPr>
             <a:fld id="{85E9AEF9-C739-6F4D-B502-3043AF841DC9}" type="datetime1">
               <a:rPr lang="en-US" smtClean="0"/>
-              <a:t>8/17/26</a:t>
+              <a:t>8/18/26</a:t>
             </a:fld>
             <a:endParaRPr lang="en-US" dirty="0"/>
           </a:p>
@@ -7229,7 +7231,7 @@
           <p:cNvPr id="2" name="Title 1">
             <a:extLst>
               <a:ext uri="{FF2B5EF4-FFF2-40B4-BE49-F238E27FC236}">
-                <a16:creationId xmlns:a16="http://schemas.microsoft.com/office/drawing/2014/main" id="{04AA9092-1496-1F4F-8649-05DBBD65563F}"/>
+                <a16:creationId xmlns:a16="http://schemas.microsoft.com/office/drawing/2014/main" id="{297947CF-EAEA-5F40-93E5-30922295C42A}"/>
               </a:ext>
             </a:extLst>
           </p:cNvPr>
@@ -7247,104 +7249,17 @@
           <a:p>
             <a:r>
               <a:rPr lang="en-US" dirty="0"/>
-              <a:t>What do I mean by advanced reactors?</a:t>
-            </a:r>
-          </a:p>
-        </p:txBody>
-      </p:sp>
-      <p:sp>
-        <p:nvSpPr>
-          <p:cNvPr id="3" name="Content Placeholder 2">
-            <a:extLst>
-              <a:ext uri="{FF2B5EF4-FFF2-40B4-BE49-F238E27FC236}">
-                <a16:creationId xmlns:a16="http://schemas.microsoft.com/office/drawing/2014/main" id="{E91DE69F-6DDA-474F-B5E8-1F8602846B07}"/>
-              </a:ext>
-            </a:extLst>
-          </p:cNvPr>
-          <p:cNvSpPr>
-            <a:spLocks noGrp="1"/>
-          </p:cNvSpPr>
-          <p:nvPr>
-            <p:ph idx="1"/>
-          </p:nvPr>
-        </p:nvSpPr>
-        <p:spPr>
-          <a:xfrm>
-            <a:off x="609601" y="2280746"/>
-            <a:ext cx="4436962" cy="3845418"/>
-          </a:xfrm>
-        </p:spPr>
-        <p:txBody>
-          <a:bodyPr>
-            <a:normAutofit fontScale="77500" lnSpcReduction="20000"/>
-          </a:bodyPr>
-          <a:lstStyle/>
-          <a:p>
-            <a:r>
-              <a:rPr lang="en-US" dirty="0"/>
-              <a:t>Several generations of reactors can be distinguished</a:t>
-            </a:r>
-          </a:p>
-          <a:p>
-            <a:r>
-              <a:rPr lang="en-US" dirty="0"/>
-              <a:t>Generation I reactors were developed in 1950-60s, and are no longer operational</a:t>
-            </a:r>
-          </a:p>
-          <a:p>
-            <a:r>
-              <a:rPr lang="en-US" dirty="0"/>
-              <a:t>Generation II reactors are the present US and French fleets and most in operation elsewhere</a:t>
-            </a:r>
-          </a:p>
-          <a:p>
-            <a:pPr lvl="1"/>
-            <a:endParaRPr lang="en-US" dirty="0"/>
-          </a:p>
-        </p:txBody>
-      </p:sp>
-      <p:pic>
-        <p:nvPicPr>
-          <p:cNvPr id="4" name="Picture 3" descr="Outline of Gen I to Gen IV reactors over time. ">
-            <a:extLst>
-              <a:ext uri="{FF2B5EF4-FFF2-40B4-BE49-F238E27FC236}">
-                <a16:creationId xmlns:a16="http://schemas.microsoft.com/office/drawing/2014/main" id="{946FE7B0-8C2C-E14A-9500-D4B0942C6546}"/>
-              </a:ext>
-            </a:extLst>
-          </p:cNvPr>
-          <p:cNvPicPr>
-            <a:picLocks noChangeAspect="1"/>
-          </p:cNvPicPr>
-          <p:nvPr/>
-        </p:nvPicPr>
-        <p:blipFill>
-          <a:blip r:embed="rId2" cstate="email">
-            <a:extLst>
-              <a:ext uri="{28A0092B-C50C-407E-A947-70E740481C1C}">
-                <a14:useLocalDpi xmlns:a14="http://schemas.microsoft.com/office/drawing/2010/main"/>
-              </a:ext>
-            </a:extLst>
-          </a:blip>
-          <a:stretch>
-            <a:fillRect/>
-          </a:stretch>
-        </p:blipFill>
-        <p:spPr>
-          <a:xfrm>
-            <a:off x="5206543" y="2093490"/>
-            <a:ext cx="6766222" cy="3697008"/>
-          </a:xfrm>
-          <a:prstGeom prst="rect">
-            <a:avLst/>
-          </a:prstGeom>
-        </p:spPr>
-      </p:pic>
-      <p:sp>
-        <p:nvSpPr>
-          <p:cNvPr id="5" name="Slide Number Placeholder 4">
-            <a:extLst>
-              <a:ext uri="{FF2B5EF4-FFF2-40B4-BE49-F238E27FC236}">
-                <a16:creationId xmlns:a16="http://schemas.microsoft.com/office/drawing/2014/main" id="{7A2231D9-1789-2DDD-5228-F0114AF2A245}"/>
+              <a:t>Advanced reactor systems</a:t>
+            </a:r>
+          </a:p>
+        </p:txBody>
+      </p:sp>
+      <p:sp>
+        <p:nvSpPr>
+          <p:cNvPr id="3" name="Slide Number Placeholder 2">
+            <a:extLst>
+              <a:ext uri="{FF2B5EF4-FFF2-40B4-BE49-F238E27FC236}">
+                <a16:creationId xmlns:a16="http://schemas.microsoft.com/office/drawing/2014/main" id="{1067FE7F-C23C-59CD-99A1-30E34970B84E}"/>
               </a:ext>
             </a:extLst>
           </p:cNvPr>
@@ -7363,7 +7278,7 @@
             <a:pPr>
               <a:defRPr/>
             </a:pPr>
-            <a:fld id="{3FF2C605-4958-CF43-AA48-80339EFDB0AF}" type="slidenum">
+            <a:fld id="{0DA6BD0F-ABBC-C14D-BC96-77BE126A748B}" type="slidenum">
               <a:rPr lang="en-US" smtClean="0"/>
               <a:pPr>
                 <a:defRPr/>
@@ -7377,7 +7292,7 @@
     </p:spTree>
     <p:extLst>
       <p:ext uri="{BB962C8B-B14F-4D97-AF65-F5344CB8AC3E}">
-        <p14:creationId xmlns:p14="http://schemas.microsoft.com/office/powerpoint/2010/main" val="485938955"/>
+        <p14:creationId xmlns:p14="http://schemas.microsoft.com/office/powerpoint/2010/main" val="2813437046"/>
       </p:ext>
     </p:extLst>
   </p:cSld>
@@ -7450,8 +7365,8 @@
         </p:nvSpPr>
         <p:spPr>
           <a:xfrm>
-            <a:off x="609600" y="2280746"/>
-            <a:ext cx="10733590" cy="3845418"/>
+            <a:off x="609601" y="2280746"/>
+            <a:ext cx="4436962" cy="3845418"/>
           </a:xfrm>
         </p:spPr>
         <p:txBody>
@@ -7462,56 +7377,19 @@
           <a:p>
             <a:r>
               <a:rPr lang="en-US" dirty="0"/>
-              <a:t>Generation III or III+ have been constructed and typically have:</a:t>
-            </a:r>
-          </a:p>
-          <a:p>
-            <a:pPr lvl="1"/>
-            <a:r>
-              <a:rPr lang="en-US" sz="2900" dirty="0"/>
-              <a:t>A more standardized design for each type to expedite licensing, reduce capital cost and reduce construction time</a:t>
-            </a:r>
-          </a:p>
-          <a:p>
-            <a:pPr lvl="1"/>
-            <a:r>
-              <a:rPr lang="en-US" sz="2900" dirty="0"/>
-              <a:t>A simpler and more rugged design, making them easier to operate and less vulnerable to operational upsets</a:t>
-            </a:r>
-          </a:p>
-          <a:p>
-            <a:pPr lvl="1"/>
-            <a:r>
-              <a:rPr lang="en-US" sz="2900" dirty="0"/>
-              <a:t>Higher availability and longer operating life – typically 60 years</a:t>
-            </a:r>
-          </a:p>
-          <a:p>
-            <a:pPr lvl="1"/>
-            <a:r>
-              <a:rPr lang="en-US" sz="2900" dirty="0"/>
-              <a:t>Further reduced possibility of core melt accidents</a:t>
-            </a:r>
-          </a:p>
-          <a:p>
-            <a:pPr lvl="1"/>
-            <a:r>
-              <a:rPr lang="en-US" sz="2900" dirty="0"/>
-              <a:t>Stronger reinforcement against aircraft impact than earlier designs, to resist radiological release</a:t>
-            </a:r>
-          </a:p>
-          <a:p>
-            <a:pPr lvl="1"/>
-            <a:r>
-              <a:rPr lang="en-US" sz="2900" dirty="0"/>
-              <a:t>Higher burn-up to use fuel more fully and efficiently and reduce the amount of waste</a:t>
-            </a:r>
-          </a:p>
-          <a:p>
-            <a:pPr lvl="1"/>
-            <a:r>
-              <a:rPr lang="en-US" sz="2900" dirty="0"/>
-              <a:t>Greater use of burnable absorbers ('poisons') to extend fuel life</a:t>
+              <a:t>Several generations of reactors can be distinguished</a:t>
+            </a:r>
+          </a:p>
+          <a:p>
+            <a:r>
+              <a:rPr lang="en-US" dirty="0"/>
+              <a:t>Generation I reactors were developed in 1950-60s, and are no longer operational</a:t>
+            </a:r>
+          </a:p>
+          <a:p>
+            <a:r>
+              <a:rPr lang="en-US" dirty="0"/>
+              <a:t>Generation II reactors are the present US and French fleets and most in operation elsewhere</a:t>
             </a:r>
           </a:p>
           <a:p>
@@ -7520,12 +7398,48 @@
           </a:p>
         </p:txBody>
       </p:sp>
-      <p:sp>
-        <p:nvSpPr>
-          <p:cNvPr id="4" name="Slide Number Placeholder 3">
-            <a:extLst>
-              <a:ext uri="{FF2B5EF4-FFF2-40B4-BE49-F238E27FC236}">
-                <a16:creationId xmlns:a16="http://schemas.microsoft.com/office/drawing/2014/main" id="{31546905-519C-B27A-F4B6-B3F05CBDDEE0}"/>
+      <p:pic>
+        <p:nvPicPr>
+          <p:cNvPr id="4" name="Picture 3" descr="Outline of Gen I to Gen IV reactors over time. ">
+            <a:extLst>
+              <a:ext uri="{FF2B5EF4-FFF2-40B4-BE49-F238E27FC236}">
+                <a16:creationId xmlns:a16="http://schemas.microsoft.com/office/drawing/2014/main" id="{946FE7B0-8C2C-E14A-9500-D4B0942C6546}"/>
+              </a:ext>
+            </a:extLst>
+          </p:cNvPr>
+          <p:cNvPicPr>
+            <a:picLocks noChangeAspect="1"/>
+          </p:cNvPicPr>
+          <p:nvPr/>
+        </p:nvPicPr>
+        <p:blipFill>
+          <a:blip r:embed="rId2" cstate="email">
+            <a:extLst>
+              <a:ext uri="{28A0092B-C50C-407E-A947-70E740481C1C}">
+                <a14:useLocalDpi xmlns:a14="http://schemas.microsoft.com/office/drawing/2010/main"/>
+              </a:ext>
+            </a:extLst>
+          </a:blip>
+          <a:stretch>
+            <a:fillRect/>
+          </a:stretch>
+        </p:blipFill>
+        <p:spPr>
+          <a:xfrm>
+            <a:off x="5206543" y="2093490"/>
+            <a:ext cx="6766222" cy="3697008"/>
+          </a:xfrm>
+          <a:prstGeom prst="rect">
+            <a:avLst/>
+          </a:prstGeom>
+        </p:spPr>
+      </p:pic>
+      <p:sp>
+        <p:nvSpPr>
+          <p:cNvPr id="5" name="Slide Number Placeholder 4">
+            <a:extLst>
+              <a:ext uri="{FF2B5EF4-FFF2-40B4-BE49-F238E27FC236}">
+                <a16:creationId xmlns:a16="http://schemas.microsoft.com/office/drawing/2014/main" id="{7A2231D9-1789-2DDD-5228-F0114AF2A245}"/>
               </a:ext>
             </a:extLst>
           </p:cNvPr>
@@ -7558,7 +7472,7 @@
     </p:spTree>
     <p:extLst>
       <p:ext uri="{BB962C8B-B14F-4D97-AF65-F5344CB8AC3E}">
-        <p14:creationId xmlns:p14="http://schemas.microsoft.com/office/powerpoint/2010/main" val="1418985018"/>
+        <p14:creationId xmlns:p14="http://schemas.microsoft.com/office/powerpoint/2010/main" val="485938955"/>
       </p:ext>
     </p:extLst>
   </p:cSld>
@@ -7590,7 +7504,7 @@
           <p:cNvPr id="2" name="Title 1">
             <a:extLst>
               <a:ext uri="{FF2B5EF4-FFF2-40B4-BE49-F238E27FC236}">
-                <a16:creationId xmlns:a16="http://schemas.microsoft.com/office/drawing/2014/main" id="{8006BF34-E96C-5A4A-B3F1-39F7A9C826CF}"/>
+                <a16:creationId xmlns:a16="http://schemas.microsoft.com/office/drawing/2014/main" id="{04AA9092-1496-1F4F-8649-05DBBD65563F}"/>
               </a:ext>
             </a:extLst>
           </p:cNvPr>
@@ -7608,7 +7522,7 @@
           <a:p>
             <a:r>
               <a:rPr lang="en-US" dirty="0"/>
-              <a:t>Generation III Reactors</a:t>
+              <a:t>What do I mean by advanced reactors?</a:t>
             </a:r>
           </a:p>
         </p:txBody>
@@ -7618,7 +7532,7 @@
           <p:cNvPr id="3" name="Content Placeholder 2">
             <a:extLst>
               <a:ext uri="{FF2B5EF4-FFF2-40B4-BE49-F238E27FC236}">
-                <a16:creationId xmlns:a16="http://schemas.microsoft.com/office/drawing/2014/main" id="{D53B8168-CC7E-CD48-A149-19944674D27D}"/>
+                <a16:creationId xmlns:a16="http://schemas.microsoft.com/office/drawing/2014/main" id="{E91DE69F-6DDA-474F-B5E8-1F8602846B07}"/>
               </a:ext>
             </a:extLst>
           </p:cNvPr>
@@ -7631,77 +7545,82 @@
         </p:nvSpPr>
         <p:spPr>
           <a:xfrm>
-            <a:off x="609601" y="2280746"/>
-            <a:ext cx="5432384" cy="3845418"/>
+            <a:off x="609600" y="2280746"/>
+            <a:ext cx="10733590" cy="3845418"/>
           </a:xfrm>
         </p:spPr>
         <p:txBody>
           <a:bodyPr>
-            <a:normAutofit fontScale="85000" lnSpcReduction="20000"/>
+            <a:normAutofit fontScale="77500" lnSpcReduction="20000"/>
           </a:bodyPr>
           <a:lstStyle/>
           <a:p>
             <a:r>
               <a:rPr lang="en-US" dirty="0"/>
-              <a:t>The greatest departure from Gen II reactors is the incorporation passive of safety features</a:t>
-            </a:r>
-          </a:p>
-          <a:p>
-            <a:r>
-              <a:rPr lang="en-US" dirty="0"/>
-              <a:t>Construction is often modular, allowing for offsite manufacturing and onsite assembly</a:t>
-            </a:r>
-          </a:p>
-          <a:p>
-            <a:r>
-              <a:rPr lang="en-US" dirty="0"/>
-              <a:t>Examples include AP1000, EPR, ABWR</a:t>
-            </a:r>
-          </a:p>
-        </p:txBody>
-      </p:sp>
-      <p:pic>
-        <p:nvPicPr>
-          <p:cNvPr id="5" name="Picture 4" descr="Schematic of an AP1000 reactor design.">
-            <a:extLst>
-              <a:ext uri="{FF2B5EF4-FFF2-40B4-BE49-F238E27FC236}">
-                <a16:creationId xmlns:a16="http://schemas.microsoft.com/office/drawing/2014/main" id="{29972EC9-6BA2-FC49-85B4-6E570B96BE02}"/>
-              </a:ext>
-            </a:extLst>
-          </p:cNvPr>
-          <p:cNvPicPr>
-            <a:picLocks noChangeAspect="1"/>
-          </p:cNvPicPr>
-          <p:nvPr/>
-        </p:nvPicPr>
-        <p:blipFill>
-          <a:blip r:embed="rId2" cstate="email">
-            <a:extLst>
-              <a:ext uri="{28A0092B-C50C-407E-A947-70E740481C1C}">
-                <a14:useLocalDpi xmlns:a14="http://schemas.microsoft.com/office/drawing/2010/main"/>
-              </a:ext>
-            </a:extLst>
-          </a:blip>
-          <a:stretch>
-            <a:fillRect/>
-          </a:stretch>
-        </p:blipFill>
-        <p:spPr>
-          <a:xfrm>
-            <a:off x="6283206" y="2090012"/>
-            <a:ext cx="5299194" cy="4226886"/>
-          </a:xfrm>
-          <a:prstGeom prst="rect">
-            <a:avLst/>
-          </a:prstGeom>
-        </p:spPr>
-      </p:pic>
+              <a:t>Generation III or III+ have been constructed and typically have:</a:t>
+            </a:r>
+          </a:p>
+          <a:p>
+            <a:pPr lvl="1"/>
+            <a:r>
+              <a:rPr lang="en-US" sz="2900" dirty="0"/>
+              <a:t>A more standardized design for each type to expedite licensing, reduce capital cost and reduce construction time</a:t>
+            </a:r>
+          </a:p>
+          <a:p>
+            <a:pPr lvl="1"/>
+            <a:r>
+              <a:rPr lang="en-US" sz="2900" dirty="0"/>
+              <a:t>A simpler and more rugged design, making them easier to operate and less vulnerable to operational upsets</a:t>
+            </a:r>
+          </a:p>
+          <a:p>
+            <a:pPr lvl="1"/>
+            <a:r>
+              <a:rPr lang="en-US" sz="2900" dirty="0"/>
+              <a:t>Higher availability and longer operating life – typically 60 years</a:t>
+            </a:r>
+          </a:p>
+          <a:p>
+            <a:pPr lvl="1"/>
+            <a:r>
+              <a:rPr lang="en-US" sz="2900" dirty="0"/>
+              <a:t>Further reduced possibility of core melt accidents</a:t>
+            </a:r>
+          </a:p>
+          <a:p>
+            <a:pPr lvl="1"/>
+            <a:r>
+              <a:rPr lang="en-US" sz="2900" dirty="0"/>
+              <a:t>Stronger reinforcement against aircraft impact than earlier designs, to resist radiological release</a:t>
+            </a:r>
+          </a:p>
+          <a:p>
+            <a:pPr lvl="1"/>
+            <a:r>
+              <a:rPr lang="en-US" sz="2900" dirty="0"/>
+              <a:t>Higher burn-up to use fuel more fully and efficiently and reduce the amount of waste</a:t>
+            </a:r>
+          </a:p>
+          <a:p>
+            <a:pPr lvl="1"/>
+            <a:r>
+              <a:rPr lang="en-US" sz="2900" dirty="0"/>
+              <a:t>Greater use of burnable absorbers ('poisons') to extend fuel life</a:t>
+            </a:r>
+          </a:p>
+          <a:p>
+            <a:pPr lvl="1"/>
+            <a:endParaRPr lang="en-US" dirty="0"/>
+          </a:p>
+        </p:txBody>
+      </p:sp>
       <p:sp>
         <p:nvSpPr>
           <p:cNvPr id="4" name="Slide Number Placeholder 3">
             <a:extLst>
               <a:ext uri="{FF2B5EF4-FFF2-40B4-BE49-F238E27FC236}">
-                <a16:creationId xmlns:a16="http://schemas.microsoft.com/office/drawing/2014/main" id="{838314CE-3A5C-9640-4B9F-71314D581F9E}"/>
+                <a16:creationId xmlns:a16="http://schemas.microsoft.com/office/drawing/2014/main" id="{31546905-519C-B27A-F4B6-B3F05CBDDEE0}"/>
               </a:ext>
             </a:extLst>
           </p:cNvPr>
@@ -7734,7 +7653,7 @@
     </p:spTree>
     <p:extLst>
       <p:ext uri="{BB962C8B-B14F-4D97-AF65-F5344CB8AC3E}">
-        <p14:creationId xmlns:p14="http://schemas.microsoft.com/office/powerpoint/2010/main" val="699190455"/>
+        <p14:creationId xmlns:p14="http://schemas.microsoft.com/office/powerpoint/2010/main" val="1418985018"/>
       </p:ext>
     </p:extLst>
   </p:cSld>
@@ -7766,7 +7685,7 @@
           <p:cNvPr id="2" name="Title 1">
             <a:extLst>
               <a:ext uri="{FF2B5EF4-FFF2-40B4-BE49-F238E27FC236}">
-                <a16:creationId xmlns:a16="http://schemas.microsoft.com/office/drawing/2014/main" id="{04AA9092-1496-1F4F-8649-05DBBD65563F}"/>
+                <a16:creationId xmlns:a16="http://schemas.microsoft.com/office/drawing/2014/main" id="{8006BF34-E96C-5A4A-B3F1-39F7A9C826CF}"/>
               </a:ext>
             </a:extLst>
           </p:cNvPr>
@@ -7784,7 +7703,7 @@
           <a:p>
             <a:r>
               <a:rPr lang="en-US" dirty="0"/>
-              <a:t>What do I mean by advanced reactors?</a:t>
+              <a:t>Generation III Reactors</a:t>
             </a:r>
           </a:p>
         </p:txBody>
@@ -7794,7 +7713,7 @@
           <p:cNvPr id="3" name="Content Placeholder 2">
             <a:extLst>
               <a:ext uri="{FF2B5EF4-FFF2-40B4-BE49-F238E27FC236}">
-                <a16:creationId xmlns:a16="http://schemas.microsoft.com/office/drawing/2014/main" id="{E91DE69F-6DDA-474F-B5E8-1F8602846B07}"/>
+                <a16:creationId xmlns:a16="http://schemas.microsoft.com/office/drawing/2014/main" id="{D53B8168-CC7E-CD48-A149-19944674D27D}"/>
               </a:ext>
             </a:extLst>
           </p:cNvPr>
@@ -7807,68 +7726,41 @@
         </p:nvSpPr>
         <p:spPr>
           <a:xfrm>
-            <a:off x="609600" y="2280746"/>
-            <a:ext cx="5061995" cy="3845418"/>
+            <a:off x="609601" y="2280746"/>
+            <a:ext cx="5432384" cy="3845418"/>
           </a:xfrm>
         </p:spPr>
         <p:txBody>
           <a:bodyPr>
-            <a:normAutofit fontScale="70000" lnSpcReduction="20000"/>
+            <a:normAutofit fontScale="85000" lnSpcReduction="20000"/>
           </a:bodyPr>
           <a:lstStyle/>
           <a:p>
             <a:r>
               <a:rPr lang="en-US" dirty="0"/>
-              <a:t>Generation IV</a:t>
-            </a:r>
-          </a:p>
-          <a:p>
-            <a:pPr lvl="1"/>
-            <a:r>
-              <a:rPr lang="en-US" sz="2900" dirty="0"/>
-              <a:t>designs are largely still conceptual</a:t>
-            </a:r>
-          </a:p>
-          <a:p>
-            <a:pPr lvl="1"/>
-            <a:r>
-              <a:rPr lang="en-US" sz="2900" dirty="0"/>
-              <a:t>typically incorporates five-seven reactor designs</a:t>
-            </a:r>
-          </a:p>
-          <a:p>
-            <a:pPr lvl="1"/>
-            <a:r>
-              <a:rPr lang="en-US" sz="2900" dirty="0"/>
-              <a:t>four of these types are fast reactors</a:t>
-            </a:r>
-          </a:p>
-          <a:p>
-            <a:pPr lvl="1"/>
-            <a:r>
-              <a:rPr lang="en-US" sz="2900" dirty="0"/>
-              <a:t>all operate at higher temperatures </a:t>
-            </a:r>
-          </a:p>
-          <a:p>
-            <a:pPr lvl="1"/>
-            <a:r>
-              <a:rPr lang="en-US" sz="2900" dirty="0"/>
-              <a:t>all systems represent advances in sustainability, economics, safety, reliability, and proliferation-resistance</a:t>
-            </a:r>
-          </a:p>
-          <a:p>
-            <a:pPr lvl="1"/>
-            <a:endParaRPr lang="en-US" dirty="0"/>
+              <a:t>The greatest departure from Gen II reactors is the incorporation passive of safety features</a:t>
+            </a:r>
+          </a:p>
+          <a:p>
+            <a:r>
+              <a:rPr lang="en-US" dirty="0"/>
+              <a:t>Construction is often modular, allowing for offsite manufacturing and onsite assembly</a:t>
+            </a:r>
+          </a:p>
+          <a:p>
+            <a:r>
+              <a:rPr lang="en-US" dirty="0"/>
+              <a:t>Examples include AP1000 (maybe III+), EPR, ABWR</a:t>
+            </a:r>
           </a:p>
         </p:txBody>
       </p:sp>
       <p:pic>
         <p:nvPicPr>
-          <p:cNvPr id="4" name="Picture 3" descr="Table of advanced reactor concepts, including neutron spectrum, coolant, temperature range, relative pressure, and applications. ">
-            <a:extLst>
-              <a:ext uri="{FF2B5EF4-FFF2-40B4-BE49-F238E27FC236}">
-                <a16:creationId xmlns:a16="http://schemas.microsoft.com/office/drawing/2014/main" id="{2F9515B5-D690-F84E-94FD-A0109A749343}"/>
+          <p:cNvPr id="5" name="Picture 4" descr="Schematic of an AP1000 reactor design.">
+            <a:extLst>
+              <a:ext uri="{FF2B5EF4-FFF2-40B4-BE49-F238E27FC236}">
+                <a16:creationId xmlns:a16="http://schemas.microsoft.com/office/drawing/2014/main" id="{29972EC9-6BA2-FC49-85B4-6E570B96BE02}"/>
               </a:ext>
             </a:extLst>
           </p:cNvPr>
@@ -7891,8 +7783,8 @@
         </p:blipFill>
         <p:spPr>
           <a:xfrm>
-            <a:off x="5825897" y="1864328"/>
-            <a:ext cx="5941760" cy="4889500"/>
+            <a:off x="6283206" y="2090012"/>
+            <a:ext cx="5299194" cy="4226886"/>
           </a:xfrm>
           <a:prstGeom prst="rect">
             <a:avLst/>
@@ -7901,10 +7793,10 @@
       </p:pic>
       <p:sp>
         <p:nvSpPr>
-          <p:cNvPr id="5" name="Slide Number Placeholder 4">
-            <a:extLst>
-              <a:ext uri="{FF2B5EF4-FFF2-40B4-BE49-F238E27FC236}">
-                <a16:creationId xmlns:a16="http://schemas.microsoft.com/office/drawing/2014/main" id="{4040C86A-3973-70BA-94E0-94BE7B70CA35}"/>
+          <p:cNvPr id="4" name="Slide Number Placeholder 3">
+            <a:extLst>
+              <a:ext uri="{FF2B5EF4-FFF2-40B4-BE49-F238E27FC236}">
+                <a16:creationId xmlns:a16="http://schemas.microsoft.com/office/drawing/2014/main" id="{838314CE-3A5C-9640-4B9F-71314D581F9E}"/>
               </a:ext>
             </a:extLst>
           </p:cNvPr>
@@ -7937,7 +7829,7 @@
     </p:spTree>
     <p:extLst>
       <p:ext uri="{BB962C8B-B14F-4D97-AF65-F5344CB8AC3E}">
-        <p14:creationId xmlns:p14="http://schemas.microsoft.com/office/powerpoint/2010/main" val="2979256566"/>
+        <p14:creationId xmlns:p14="http://schemas.microsoft.com/office/powerpoint/2010/main" val="699190455"/>
       </p:ext>
     </p:extLst>
   </p:cSld>
@@ -7969,7 +7861,7 @@
           <p:cNvPr id="2" name="Title 1">
             <a:extLst>
               <a:ext uri="{FF2B5EF4-FFF2-40B4-BE49-F238E27FC236}">
-                <a16:creationId xmlns:a16="http://schemas.microsoft.com/office/drawing/2014/main" id="{10F3271D-15D7-1DA1-BD2E-7C45EC139BFE}"/>
+                <a16:creationId xmlns:a16="http://schemas.microsoft.com/office/drawing/2014/main" id="{04AA9092-1496-1F4F-8649-05DBBD65563F}"/>
               </a:ext>
             </a:extLst>
           </p:cNvPr>
@@ -7987,7 +7879,7 @@
           <a:p>
             <a:r>
               <a:rPr lang="en-US" dirty="0"/>
-              <a:t>Selected Advanced* Reactor Designs</a:t>
+              <a:t>What do I mean by advanced reactors?</a:t>
             </a:r>
           </a:p>
         </p:txBody>
@@ -7997,7 +7889,7 @@
           <p:cNvPr id="3" name="Content Placeholder 2">
             <a:extLst>
               <a:ext uri="{FF2B5EF4-FFF2-40B4-BE49-F238E27FC236}">
-                <a16:creationId xmlns:a16="http://schemas.microsoft.com/office/drawing/2014/main" id="{6270072A-3A58-37E6-D19C-96D734D36A24}"/>
+                <a16:creationId xmlns:a16="http://schemas.microsoft.com/office/drawing/2014/main" id="{E91DE69F-6DDA-474F-B5E8-1F8602846B07}"/>
               </a:ext>
             </a:extLst>
           </p:cNvPr>
@@ -8007,125 +7899,107 @@
           <p:nvPr>
             <p:ph idx="1"/>
           </p:nvPr>
-        </p:nvSpPr>
-        <p:spPr/>
-        <p:txBody>
-          <a:bodyPr/>
-          <a:lstStyle/>
-          <a:p>
-            <a:r>
-              <a:rPr lang="en-US" sz="2400" dirty="0"/>
-              <a:t>PWR: Westinghouse: AP-1000, AP-600; </a:t>
-            </a:r>
-            <a:r>
-              <a:rPr lang="en-US" sz="2400" dirty="0" err="1"/>
-              <a:t>Framatome</a:t>
-            </a:r>
-            <a:r>
-              <a:rPr lang="en-US" sz="2400" dirty="0"/>
-              <a:t>: EPR; KHNP: APR+; </a:t>
-            </a:r>
-            <a:r>
-              <a:rPr lang="en-US" sz="2400" dirty="0" err="1"/>
-              <a:t>Gidropress</a:t>
-            </a:r>
-            <a:r>
-              <a:rPr lang="en-US" sz="2400" dirty="0"/>
-              <a:t>: VVER-1200</a:t>
-            </a:r>
-          </a:p>
-          <a:p>
-            <a:r>
-              <a:rPr lang="en-US" sz="2400" dirty="0"/>
-              <a:t>GCR: </a:t>
-            </a:r>
-            <a:r>
-              <a:rPr lang="en-US" sz="2400" dirty="0" err="1"/>
-              <a:t>Framatome</a:t>
-            </a:r>
-            <a:r>
-              <a:rPr lang="en-US" sz="2400" dirty="0"/>
-              <a:t>: SC-HTGR; GA: Prismatic HTR</a:t>
-            </a:r>
-          </a:p>
-          <a:p>
-            <a:r>
-              <a:rPr lang="en-US" sz="2400" dirty="0"/>
-              <a:t>SFR: CEA: ASTRID; JAEA: JSFR; GE-Hitachi: PRISM</a:t>
-            </a:r>
-          </a:p>
-          <a:p>
-            <a:r>
-              <a:rPr lang="en-US" sz="2400" dirty="0"/>
-              <a:t>MSR: Terrestrial: IMSR-400; </a:t>
-            </a:r>
-            <a:r>
-              <a:rPr lang="en-US" sz="2400" dirty="0" err="1"/>
-              <a:t>Flibe</a:t>
-            </a:r>
-            <a:r>
-              <a:rPr lang="en-US" sz="2400" dirty="0"/>
-              <a:t> Energy: LFTR; Seaborg: MSTW</a:t>
-            </a:r>
-          </a:p>
-          <a:p>
-            <a:r>
-              <a:rPr lang="en-US" sz="2400" dirty="0"/>
-              <a:t>Can consult the Advanced Reactors Information System (ARIS) from the IAEA for more information: https://</a:t>
-            </a:r>
-            <a:r>
-              <a:rPr lang="en-US" sz="2400" dirty="0" err="1"/>
-              <a:t>aris.iaea.org</a:t>
-            </a:r>
-            <a:r>
-              <a:rPr lang="en-US" sz="2400" dirty="0"/>
-              <a:t>/</a:t>
-            </a:r>
-          </a:p>
-        </p:txBody>
-      </p:sp>
-      <p:sp>
-        <p:nvSpPr>
-          <p:cNvPr id="4" name="TextBox 3">
-            <a:extLst>
-              <a:ext uri="{FF2B5EF4-FFF2-40B4-BE49-F238E27FC236}">
-                <a16:creationId xmlns:a16="http://schemas.microsoft.com/office/drawing/2014/main" id="{0DDA52FB-C2A0-378D-AD12-F8E627566E0A}"/>
-              </a:ext>
-            </a:extLst>
-          </p:cNvPr>
-          <p:cNvSpPr txBox="1"/>
-          <p:nvPr/>
         </p:nvSpPr>
         <p:spPr>
           <a:xfrm>
-            <a:off x="3184634" y="5773221"/>
-            <a:ext cx="5822731" cy="369332"/>
+            <a:off x="609600" y="2280746"/>
+            <a:ext cx="5061995" cy="3845418"/>
+          </a:xfrm>
+        </p:spPr>
+        <p:txBody>
+          <a:bodyPr>
+            <a:normAutofit fontScale="70000" lnSpcReduction="20000"/>
+          </a:bodyPr>
+          <a:lstStyle/>
+          <a:p>
+            <a:r>
+              <a:rPr lang="en-US" dirty="0"/>
+              <a:t>Generation IV</a:t>
+            </a:r>
+          </a:p>
+          <a:p>
+            <a:pPr lvl="1"/>
+            <a:r>
+              <a:rPr lang="en-US" sz="2900" dirty="0"/>
+              <a:t>designs are largely still conceptual</a:t>
+            </a:r>
+          </a:p>
+          <a:p>
+            <a:pPr lvl="1"/>
+            <a:r>
+              <a:rPr lang="en-US" sz="2900" dirty="0"/>
+              <a:t>typically incorporates five-seven reactor designs</a:t>
+            </a:r>
+          </a:p>
+          <a:p>
+            <a:pPr lvl="1"/>
+            <a:r>
+              <a:rPr lang="en-US" sz="2900" dirty="0"/>
+              <a:t>four of these types are fast reactors</a:t>
+            </a:r>
+          </a:p>
+          <a:p>
+            <a:pPr lvl="1"/>
+            <a:r>
+              <a:rPr lang="en-US" sz="2900" dirty="0"/>
+              <a:t>all operate at higher temperatures </a:t>
+            </a:r>
+          </a:p>
+          <a:p>
+            <a:pPr lvl="1"/>
+            <a:r>
+              <a:rPr lang="en-US" sz="2900" dirty="0"/>
+              <a:t>all systems represent advances in sustainability, economics, safety, reliability, and proliferation-resistance</a:t>
+            </a:r>
+          </a:p>
+          <a:p>
+            <a:pPr lvl="1"/>
+            <a:endParaRPr lang="en-US" dirty="0"/>
+          </a:p>
+        </p:txBody>
+      </p:sp>
+      <p:pic>
+        <p:nvPicPr>
+          <p:cNvPr id="4" name="Picture 3" descr="Table of advanced reactor concepts, including neutron spectrum, coolant, temperature range, relative pressure, and applications. ">
+            <a:extLst>
+              <a:ext uri="{FF2B5EF4-FFF2-40B4-BE49-F238E27FC236}">
+                <a16:creationId xmlns:a16="http://schemas.microsoft.com/office/drawing/2014/main" id="{2F9515B5-D690-F84E-94FD-A0109A749343}"/>
+              </a:ext>
+            </a:extLst>
+          </p:cNvPr>
+          <p:cNvPicPr>
+            <a:picLocks noChangeAspect="1"/>
+          </p:cNvPicPr>
+          <p:nvPr/>
+        </p:nvPicPr>
+        <p:blipFill>
+          <a:blip r:embed="rId2" cstate="email">
+            <a:extLst>
+              <a:ext uri="{28A0092B-C50C-407E-A947-70E740481C1C}">
+                <a14:useLocalDpi xmlns:a14="http://schemas.microsoft.com/office/drawing/2010/main"/>
+              </a:ext>
+            </a:extLst>
+          </a:blip>
+          <a:stretch>
+            <a:fillRect/>
+          </a:stretch>
+        </p:blipFill>
+        <p:spPr>
+          <a:xfrm>
+            <a:off x="5825897" y="1864328"/>
+            <a:ext cx="5941760" cy="4889500"/>
           </a:xfrm>
           <a:prstGeom prst="rect">
             <a:avLst/>
           </a:prstGeom>
-          <a:noFill/>
         </p:spPr>
-        <p:txBody>
-          <a:bodyPr wrap="square" rtlCol="0">
-            <a:spAutoFit/>
-          </a:bodyPr>
-          <a:lstStyle/>
-          <a:p>
-            <a:pPr algn="ctr"/>
-            <a:r>
-              <a:rPr lang="en-US" dirty="0"/>
-              <a:t>*Have included some Gen III here…</a:t>
-            </a:r>
-          </a:p>
-        </p:txBody>
-      </p:sp>
+      </p:pic>
       <p:sp>
         <p:nvSpPr>
           <p:cNvPr id="5" name="Slide Number Placeholder 4">
             <a:extLst>
               <a:ext uri="{FF2B5EF4-FFF2-40B4-BE49-F238E27FC236}">
-                <a16:creationId xmlns:a16="http://schemas.microsoft.com/office/drawing/2014/main" id="{1087B35D-A2E5-D14F-B156-841C1DDC646B}"/>
+                <a16:creationId xmlns:a16="http://schemas.microsoft.com/office/drawing/2014/main" id="{4040C86A-3973-70BA-94E0-94BE7B70CA35}"/>
               </a:ext>
             </a:extLst>
           </p:cNvPr>
@@ -8158,7 +8032,7 @@
     </p:spTree>
     <p:extLst>
       <p:ext uri="{BB962C8B-B14F-4D97-AF65-F5344CB8AC3E}">
-        <p14:creationId xmlns:p14="http://schemas.microsoft.com/office/powerpoint/2010/main" val="331026777"/>
+        <p14:creationId xmlns:p14="http://schemas.microsoft.com/office/powerpoint/2010/main" val="2979256566"/>
       </p:ext>
     </p:extLst>
   </p:cSld>
@@ -8190,7 +8064,7 @@
           <p:cNvPr id="2" name="Title 1">
             <a:extLst>
               <a:ext uri="{FF2B5EF4-FFF2-40B4-BE49-F238E27FC236}">
-                <a16:creationId xmlns:a16="http://schemas.microsoft.com/office/drawing/2014/main" id="{04AA9092-1496-1F4F-8649-05DBBD65563F}"/>
+                <a16:creationId xmlns:a16="http://schemas.microsoft.com/office/drawing/2014/main" id="{10F3271D-15D7-1DA1-BD2E-7C45EC139BFE}"/>
               </a:ext>
             </a:extLst>
           </p:cNvPr>
@@ -8208,7 +8082,7 @@
           <a:p>
             <a:r>
               <a:rPr lang="en-US" dirty="0"/>
-              <a:t>What do I mean by advanced reactors?</a:t>
+              <a:t>Selected Advanced Reactor Designs</a:t>
             </a:r>
           </a:p>
         </p:txBody>
@@ -8218,7 +8092,7 @@
           <p:cNvPr id="3" name="Content Placeholder 2">
             <a:extLst>
               <a:ext uri="{FF2B5EF4-FFF2-40B4-BE49-F238E27FC236}">
-                <a16:creationId xmlns:a16="http://schemas.microsoft.com/office/drawing/2014/main" id="{E91DE69F-6DDA-474F-B5E8-1F8602846B07}"/>
+                <a16:creationId xmlns:a16="http://schemas.microsoft.com/office/drawing/2014/main" id="{6270072A-3A58-37E6-D19C-96D734D36A24}"/>
               </a:ext>
             </a:extLst>
           </p:cNvPr>
@@ -8229,160 +8103,72 @@
             <p:ph idx="1"/>
           </p:nvPr>
         </p:nvSpPr>
-        <p:spPr>
-          <a:xfrm>
-            <a:off x="609601" y="2280746"/>
-            <a:ext cx="6474106" cy="3845418"/>
-          </a:xfrm>
-        </p:spPr>
-        <p:txBody>
-          <a:bodyPr>
-            <a:normAutofit fontScale="77500" lnSpcReduction="20000"/>
-          </a:bodyPr>
-          <a:lstStyle/>
-          <a:p>
-            <a:r>
-              <a:rPr lang="en-US" sz="2900" dirty="0"/>
-              <a:t>Small Nuclear Reactors </a:t>
-            </a:r>
-          </a:p>
-          <a:p>
-            <a:pPr lvl="1"/>
-            <a:r>
-              <a:rPr lang="en-US" sz="2800" dirty="0"/>
-              <a:t>Small Modular Reactors (SMRs)</a:t>
-            </a:r>
-          </a:p>
-          <a:p>
-            <a:pPr lvl="1"/>
-            <a:r>
-              <a:rPr lang="en-US" sz="2800" dirty="0"/>
-              <a:t>Micro-Reactors</a:t>
-            </a:r>
-          </a:p>
-          <a:p>
-            <a:r>
-              <a:rPr lang="en-US" sz="2900" dirty="0"/>
-              <a:t>Reduces the cost associated with building 1000 MW scale reactors, and can provide power away from large grid system</a:t>
-            </a:r>
-          </a:p>
-          <a:p>
-            <a:r>
-              <a:rPr lang="en-US" sz="2900" dirty="0"/>
-              <a:t>SMRs are 300 </a:t>
-            </a:r>
-            <a:r>
-              <a:rPr lang="en-US" sz="2900" dirty="0" err="1"/>
-              <a:t>MWe</a:t>
-            </a:r>
-            <a:r>
-              <a:rPr lang="en-US" sz="2900" dirty="0"/>
-              <a:t> or less, designed with modular technology using module factory fabrication, pursuing economies of series production and short construction times</a:t>
-            </a:r>
-          </a:p>
-          <a:p>
-            <a:r>
-              <a:rPr lang="en-US" sz="2900" dirty="0"/>
-              <a:t>Microreactors (or very small modular reactors </a:t>
-            </a:r>
-            <a:r>
-              <a:rPr lang="en-US" sz="2900" dirty="0" err="1"/>
-              <a:t>vSMRs</a:t>
-            </a:r>
-            <a:r>
-              <a:rPr lang="en-US" sz="2900" dirty="0"/>
-              <a:t>) are up to 25 </a:t>
-            </a:r>
-            <a:r>
-              <a:rPr lang="en-US" sz="2900" dirty="0" err="1"/>
-              <a:t>MWe</a:t>
-            </a:r>
-            <a:endParaRPr lang="en-US" sz="2900" dirty="0"/>
-          </a:p>
-          <a:p>
-            <a:pPr lvl="1"/>
-            <a:endParaRPr lang="en-US" dirty="0"/>
-          </a:p>
-        </p:txBody>
-      </p:sp>
-      <p:pic>
-        <p:nvPicPr>
-          <p:cNvPr id="5" name="Picture 4" descr="Modular reactor design.">
-            <a:extLst>
-              <a:ext uri="{FF2B5EF4-FFF2-40B4-BE49-F238E27FC236}">
-                <a16:creationId xmlns:a16="http://schemas.microsoft.com/office/drawing/2014/main" id="{11D011F4-3B4E-BF44-BB69-3947E04318D8}"/>
-              </a:ext>
-            </a:extLst>
-          </p:cNvPr>
-          <p:cNvPicPr>
-            <a:picLocks noChangeAspect="1"/>
-          </p:cNvPicPr>
-          <p:nvPr/>
-        </p:nvPicPr>
-        <p:blipFill>
-          <a:blip r:embed="rId2" cstate="email">
-            <a:extLst>
-              <a:ext uri="{28A0092B-C50C-407E-A947-70E740481C1C}">
-                <a14:useLocalDpi xmlns:a14="http://schemas.microsoft.com/office/drawing/2010/main"/>
-              </a:ext>
-            </a:extLst>
-          </a:blip>
-          <a:stretch>
-            <a:fillRect/>
-          </a:stretch>
-        </p:blipFill>
-        <p:spPr>
-          <a:xfrm>
-            <a:off x="7301069" y="1783305"/>
-            <a:ext cx="4840300" cy="2420150"/>
-          </a:xfrm>
-          <a:prstGeom prst="rect">
-            <a:avLst/>
-          </a:prstGeom>
-        </p:spPr>
-      </p:pic>
-      <p:pic>
-        <p:nvPicPr>
-          <p:cNvPr id="6" name="Picture 5" descr="Modular reactor component being transported on a semi-truck.">
-            <a:extLst>
-              <a:ext uri="{FF2B5EF4-FFF2-40B4-BE49-F238E27FC236}">
-                <a16:creationId xmlns:a16="http://schemas.microsoft.com/office/drawing/2014/main" id="{7C0B2003-0843-EC47-A0D6-91F53EF4EC30}"/>
-              </a:ext>
-            </a:extLst>
-          </p:cNvPr>
-          <p:cNvPicPr>
-            <a:picLocks noChangeAspect="1"/>
-          </p:cNvPicPr>
-          <p:nvPr/>
-        </p:nvPicPr>
-        <p:blipFill>
-          <a:blip r:embed="rId3" cstate="email">
-            <a:extLst>
-              <a:ext uri="{28A0092B-C50C-407E-A947-70E740481C1C}">
-                <a14:useLocalDpi xmlns:a14="http://schemas.microsoft.com/office/drawing/2010/main"/>
-              </a:ext>
-            </a:extLst>
-          </a:blip>
-          <a:stretch>
-            <a:fillRect/>
-          </a:stretch>
-        </p:blipFill>
-        <p:spPr>
-          <a:xfrm>
-            <a:off x="8098738" y="4203455"/>
-            <a:ext cx="3337050" cy="2219416"/>
-          </a:xfrm>
-          <a:prstGeom prst="rect">
-            <a:avLst/>
-          </a:prstGeom>
-        </p:spPr>
-      </p:pic>
-      <p:sp>
-        <p:nvSpPr>
-          <p:cNvPr id="4" name="Slide Number Placeholder 3">
-            <a:extLst>
-              <a:ext uri="{FF2B5EF4-FFF2-40B4-BE49-F238E27FC236}">
-                <a16:creationId xmlns:a16="http://schemas.microsoft.com/office/drawing/2014/main" id="{E1D58D58-0DFA-90E7-2C32-27AF0A7062E4}"/>
+        <p:spPr/>
+        <p:txBody>
+          <a:bodyPr/>
+          <a:lstStyle/>
+          <a:p>
+            <a:r>
+              <a:rPr lang="en-US" sz="2400" dirty="0"/>
+              <a:t>GEN III+ PWRs: Westinghouse: AP-1000, AP-600; Framatome: EPR; KHNP: APR+; Gidropress: VVER-1200</a:t>
+            </a:r>
+          </a:p>
+          <a:p>
+            <a:r>
+              <a:rPr lang="en-US" sz="2400" dirty="0"/>
+              <a:t>GCR: </a:t>
+            </a:r>
+            <a:r>
+              <a:rPr lang="en-US" sz="2400" dirty="0" err="1"/>
+              <a:t>Framatome</a:t>
+            </a:r>
+            <a:r>
+              <a:rPr lang="en-US" sz="2400" dirty="0"/>
+              <a:t>: SC-HTGR; GA: Prismatic HTR</a:t>
+            </a:r>
+          </a:p>
+          <a:p>
+            <a:r>
+              <a:rPr lang="en-US" sz="2400" dirty="0"/>
+              <a:t>SFR: CEA: ASTRID; JAEA: JSFR; GE-Hitachi: PRISM</a:t>
+            </a:r>
+          </a:p>
+          <a:p>
+            <a:r>
+              <a:rPr lang="en-US" sz="2400" dirty="0"/>
+              <a:t>MSR: Terrestrial: IMSR-400; </a:t>
+            </a:r>
+            <a:r>
+              <a:rPr lang="en-US" sz="2400" dirty="0" err="1"/>
+              <a:t>Flibe</a:t>
+            </a:r>
+            <a:r>
+              <a:rPr lang="en-US" sz="2400" dirty="0"/>
+              <a:t> Energy: LFTR; Seaborg: MSTW</a:t>
+            </a:r>
+          </a:p>
+          <a:p>
+            <a:r>
+              <a:rPr lang="en-US" sz="2400" dirty="0"/>
+              <a:t>Can consult the Advanced Reactors Information System (ARIS) from the IAEA for more information: https://</a:t>
+            </a:r>
+            <a:r>
+              <a:rPr lang="en-US" sz="2400" dirty="0" err="1"/>
+              <a:t>aris.iaea.org</a:t>
+            </a:r>
+            <a:r>
+              <a:rPr lang="en-US" sz="2400" dirty="0"/>
+              <a:t>/</a:t>
+            </a:r>
+          </a:p>
+        </p:txBody>
+      </p:sp>
+      <p:sp>
+        <p:nvSpPr>
+          <p:cNvPr id="5" name="Slide Number Placeholder 4">
+            <a:extLst>
+              <a:ext uri="{FF2B5EF4-FFF2-40B4-BE49-F238E27FC236}">
+                <a16:creationId xmlns:a16="http://schemas.microsoft.com/office/drawing/2014/main" id="{1087B35D-A2E5-D14F-B156-841C1DDC646B}"/>
               </a:ext>
             </a:extLst>
           </p:cNvPr>
@@ -8415,7 +8201,7 @@
     </p:spTree>
     <p:extLst>
       <p:ext uri="{BB962C8B-B14F-4D97-AF65-F5344CB8AC3E}">
-        <p14:creationId xmlns:p14="http://schemas.microsoft.com/office/powerpoint/2010/main" val="3566438561"/>
+        <p14:creationId xmlns:p14="http://schemas.microsoft.com/office/powerpoint/2010/main" val="331026777"/>
       </p:ext>
     </p:extLst>
   </p:cSld>
@@ -8447,7 +8233,7 @@
           <p:cNvPr id="2" name="Title 1">
             <a:extLst>
               <a:ext uri="{FF2B5EF4-FFF2-40B4-BE49-F238E27FC236}">
-                <a16:creationId xmlns:a16="http://schemas.microsoft.com/office/drawing/2014/main" id="{03A544D9-91A5-8B4C-9833-9E6666D0C8BC}"/>
+                <a16:creationId xmlns:a16="http://schemas.microsoft.com/office/drawing/2014/main" id="{04AA9092-1496-1F4F-8649-05DBBD65563F}"/>
               </a:ext>
             </a:extLst>
           </p:cNvPr>
@@ -8465,17 +8251,109 @@
           <a:p>
             <a:r>
               <a:rPr lang="en-US" dirty="0"/>
-              <a:t>Small Nuclear Reactors</a:t>
-            </a:r>
+              <a:t>What do I mean by advanced reactors?</a:t>
+            </a:r>
+          </a:p>
+        </p:txBody>
+      </p:sp>
+      <p:sp>
+        <p:nvSpPr>
+          <p:cNvPr id="3" name="Content Placeholder 2">
+            <a:extLst>
+              <a:ext uri="{FF2B5EF4-FFF2-40B4-BE49-F238E27FC236}">
+                <a16:creationId xmlns:a16="http://schemas.microsoft.com/office/drawing/2014/main" id="{E91DE69F-6DDA-474F-B5E8-1F8602846B07}"/>
+              </a:ext>
+            </a:extLst>
+          </p:cNvPr>
+          <p:cNvSpPr>
+            <a:spLocks noGrp="1"/>
+          </p:cNvSpPr>
+          <p:nvPr>
+            <p:ph idx="1"/>
+          </p:nvPr>
+        </p:nvSpPr>
+        <p:spPr>
+          <a:xfrm>
+            <a:off x="609601" y="2280746"/>
+            <a:ext cx="6474106" cy="3845418"/>
+          </a:xfrm>
+        </p:spPr>
+        <p:txBody>
+          <a:bodyPr>
+            <a:normAutofit fontScale="77500" lnSpcReduction="20000"/>
+          </a:bodyPr>
+          <a:lstStyle/>
+          <a:p>
+            <a:r>
+              <a:rPr lang="en-US" sz="2900" dirty="0"/>
+              <a:t>Small Nuclear Reactors </a:t>
+            </a:r>
+          </a:p>
+          <a:p>
+            <a:pPr lvl="1"/>
+            <a:r>
+              <a:rPr lang="en-US" sz="2800" dirty="0"/>
+              <a:t>Small Modular Reactors (SMRs)</a:t>
+            </a:r>
+          </a:p>
+          <a:p>
+            <a:pPr lvl="1"/>
+            <a:r>
+              <a:rPr lang="en-US" sz="2800" dirty="0"/>
+              <a:t>Micro-Reactors</a:t>
+            </a:r>
+          </a:p>
+          <a:p>
+            <a:r>
+              <a:rPr lang="en-US" sz="2900" dirty="0"/>
+              <a:t>Reduces the cost associated with building 1000 MW scale reactors, and can provide power away from large grid system</a:t>
+            </a:r>
+          </a:p>
+          <a:p>
+            <a:r>
+              <a:rPr lang="en-US" sz="2900" dirty="0"/>
+              <a:t>SMRs are 300 </a:t>
+            </a:r>
+            <a:r>
+              <a:rPr lang="en-US" sz="2900" dirty="0" err="1"/>
+              <a:t>MWe</a:t>
+            </a:r>
+            <a:r>
+              <a:rPr lang="en-US" sz="2900" dirty="0"/>
+              <a:t> or less, designed with modular technology using module factory fabrication, pursuing economies of series production and short construction times</a:t>
+            </a:r>
+          </a:p>
+          <a:p>
+            <a:r>
+              <a:rPr lang="en-US" sz="2900" dirty="0"/>
+              <a:t>Microreactors (or very small modular reactors </a:t>
+            </a:r>
+            <a:r>
+              <a:rPr lang="en-US" sz="2900" dirty="0" err="1"/>
+              <a:t>vSMRs</a:t>
+            </a:r>
+            <a:r>
+              <a:rPr lang="en-US" sz="2900" dirty="0"/>
+              <a:t>) are up to 25 </a:t>
+            </a:r>
+            <a:r>
+              <a:rPr lang="en-US" sz="2900" dirty="0" err="1"/>
+              <a:t>MWe</a:t>
+            </a:r>
+            <a:endParaRPr lang="en-US" sz="2900" dirty="0"/>
+          </a:p>
+          <a:p>
+            <a:pPr lvl="1"/>
+            <a:endParaRPr lang="en-US" dirty="0"/>
           </a:p>
         </p:txBody>
       </p:sp>
       <p:pic>
         <p:nvPicPr>
-          <p:cNvPr id="4" name="Picture 3" descr="Table of reactor information.">
-            <a:extLst>
-              <a:ext uri="{FF2B5EF4-FFF2-40B4-BE49-F238E27FC236}">
-                <a16:creationId xmlns:a16="http://schemas.microsoft.com/office/drawing/2014/main" id="{53FC065E-4EEC-6642-A897-940A49955B35}"/>
+          <p:cNvPr id="5" name="Picture 4" descr="Modular reactor design.">
+            <a:extLst>
+              <a:ext uri="{FF2B5EF4-FFF2-40B4-BE49-F238E27FC236}">
+                <a16:creationId xmlns:a16="http://schemas.microsoft.com/office/drawing/2014/main" id="{11D011F4-3B4E-BF44-BB69-3947E04318D8}"/>
               </a:ext>
             </a:extLst>
           </p:cNvPr>
@@ -8498,8 +8376,8 @@
         </p:blipFill>
         <p:spPr>
           <a:xfrm>
-            <a:off x="6632294" y="1968500"/>
-            <a:ext cx="5250566" cy="1610793"/>
+            <a:off x="7301069" y="1783305"/>
+            <a:ext cx="4840300" cy="2420150"/>
           </a:xfrm>
           <a:prstGeom prst="rect">
             <a:avLst/>
@@ -8508,10 +8386,10 @@
       </p:pic>
       <p:pic>
         <p:nvPicPr>
-          <p:cNvPr id="5" name="Picture 4" descr="Table of reactor information.">
-            <a:extLst>
-              <a:ext uri="{FF2B5EF4-FFF2-40B4-BE49-F238E27FC236}">
-                <a16:creationId xmlns:a16="http://schemas.microsoft.com/office/drawing/2014/main" id="{EF07FBDA-8F5B-A448-B384-5D79F4B716F7}"/>
+          <p:cNvPr id="6" name="Picture 5" descr="Modular reactor component being transported on a semi-truck.">
+            <a:extLst>
+              <a:ext uri="{FF2B5EF4-FFF2-40B4-BE49-F238E27FC236}">
+                <a16:creationId xmlns:a16="http://schemas.microsoft.com/office/drawing/2014/main" id="{7C0B2003-0843-EC47-A0D6-91F53EF4EC30}"/>
               </a:ext>
             </a:extLst>
           </p:cNvPr>
@@ -8534,56 +8412,20 @@
         </p:blipFill>
         <p:spPr>
           <a:xfrm>
-            <a:off x="609600" y="1945350"/>
-            <a:ext cx="5328213" cy="4267582"/>
+            <a:off x="8098738" y="4203455"/>
+            <a:ext cx="3337050" cy="2219416"/>
           </a:xfrm>
           <a:prstGeom prst="rect">
             <a:avLst/>
           </a:prstGeom>
         </p:spPr>
       </p:pic>
-      <p:pic>
-        <p:nvPicPr>
-          <p:cNvPr id="6" name="Picture 5" descr="Table of reactor information.">
-            <a:extLst>
-              <a:ext uri="{FF2B5EF4-FFF2-40B4-BE49-F238E27FC236}">
-                <a16:creationId xmlns:a16="http://schemas.microsoft.com/office/drawing/2014/main" id="{C6FCA96E-0E25-F74F-B133-22B8892C17EA}"/>
-              </a:ext>
-            </a:extLst>
-          </p:cNvPr>
-          <p:cNvPicPr>
-            <a:picLocks noChangeAspect="1"/>
-          </p:cNvPicPr>
-          <p:nvPr/>
-        </p:nvPicPr>
-        <p:blipFill>
-          <a:blip r:embed="rId4" cstate="email">
-            <a:extLst>
-              <a:ext uri="{28A0092B-C50C-407E-A947-70E740481C1C}">
-                <a14:useLocalDpi xmlns:a14="http://schemas.microsoft.com/office/drawing/2010/main"/>
-              </a:ext>
-            </a:extLst>
-          </a:blip>
-          <a:stretch>
-            <a:fillRect/>
-          </a:stretch>
-        </p:blipFill>
-        <p:spPr>
-          <a:xfrm>
-            <a:off x="6632294" y="3625014"/>
-            <a:ext cx="4868602" cy="2681136"/>
-          </a:xfrm>
-          <a:prstGeom prst="rect">
-            <a:avLst/>
-          </a:prstGeom>
-        </p:spPr>
-      </p:pic>
-      <p:sp>
-        <p:nvSpPr>
-          <p:cNvPr id="3" name="Slide Number Placeholder 2">
-            <a:extLst>
-              <a:ext uri="{FF2B5EF4-FFF2-40B4-BE49-F238E27FC236}">
-                <a16:creationId xmlns:a16="http://schemas.microsoft.com/office/drawing/2014/main" id="{23BEE61F-126B-AF8F-6D6C-892034FF9B5C}"/>
+      <p:sp>
+        <p:nvSpPr>
+          <p:cNvPr id="4" name="Slide Number Placeholder 3">
+            <a:extLst>
+              <a:ext uri="{FF2B5EF4-FFF2-40B4-BE49-F238E27FC236}">
+                <a16:creationId xmlns:a16="http://schemas.microsoft.com/office/drawing/2014/main" id="{E1D58D58-0DFA-90E7-2C32-27AF0A7062E4}"/>
               </a:ext>
             </a:extLst>
           </p:cNvPr>
@@ -8616,7 +8458,7 @@
     </p:spTree>
     <p:extLst>
       <p:ext uri="{BB962C8B-B14F-4D97-AF65-F5344CB8AC3E}">
-        <p14:creationId xmlns:p14="http://schemas.microsoft.com/office/powerpoint/2010/main" val="3563952051"/>
+        <p14:creationId xmlns:p14="http://schemas.microsoft.com/office/powerpoint/2010/main" val="3566438561"/>
       </p:ext>
     </p:extLst>
   </p:cSld>
@@ -8648,7 +8490,7 @@
           <p:cNvPr id="2" name="Title 1">
             <a:extLst>
               <a:ext uri="{FF2B5EF4-FFF2-40B4-BE49-F238E27FC236}">
-                <a16:creationId xmlns:a16="http://schemas.microsoft.com/office/drawing/2014/main" id="{D77A9FF5-3AB3-2D22-C68C-3E00A56A77C6}"/>
+                <a16:creationId xmlns:a16="http://schemas.microsoft.com/office/drawing/2014/main" id="{03A544D9-91A5-8B4C-9833-9E6666D0C8BC}"/>
               </a:ext>
             </a:extLst>
           </p:cNvPr>
@@ -8666,63 +8508,125 @@
           <a:p>
             <a:r>
               <a:rPr lang="en-US" dirty="0"/>
-              <a:t>DOE Push for Advanced Reactors</a:t>
-            </a:r>
-          </a:p>
-        </p:txBody>
-      </p:sp>
-      <p:sp>
-        <p:nvSpPr>
-          <p:cNvPr id="3" name="Content Placeholder 2">
-            <a:extLst>
-              <a:ext uri="{FF2B5EF4-FFF2-40B4-BE49-F238E27FC236}">
-                <a16:creationId xmlns:a16="http://schemas.microsoft.com/office/drawing/2014/main" id="{1B3003FF-87BC-C330-610C-756228C3A68B}"/>
-              </a:ext>
-            </a:extLst>
-          </p:cNvPr>
-          <p:cNvSpPr>
-            <a:spLocks noGrp="1"/>
-          </p:cNvSpPr>
-          <p:nvPr>
-            <p:ph idx="1"/>
-          </p:nvPr>
-        </p:nvSpPr>
-        <p:spPr/>
-        <p:txBody>
-          <a:bodyPr/>
-          <a:lstStyle/>
-          <a:p>
-            <a:r>
-              <a:rPr lang="en-US" sz="2000" dirty="0"/>
-              <a:t>DOE is funding a lot of research into advanced reactor systems</a:t>
-            </a:r>
-          </a:p>
-          <a:p>
-            <a:r>
-              <a:rPr lang="en-US" sz="2000" dirty="0"/>
-              <a:t>The Advanced Reactor Demonstration Program (ARDP) seeks to rapidly develop advanced reactor concepts</a:t>
-            </a:r>
-          </a:p>
-          <a:p>
-            <a:r>
-              <a:rPr lang="en-US" sz="2000" dirty="0"/>
-              <a:t>The National Reactor Innovation Center (NRIC) supports the construction and demonstration of advanced reactor systems committed to demonstrating advanced reactors by the end of 2025</a:t>
-            </a:r>
-          </a:p>
-          <a:p>
-            <a:r>
-              <a:rPr lang="en-US" sz="2000" dirty="0"/>
-              <a:t>The Office of Advanced Reactor Technologies (ART) sponsors research, development and deployment (RD&amp;D) activities, with a focus on advancing scientific understanding of these technologies, establishing an international network of user facilities for civil nuclear RD&amp;D, improving economic competitiveness, and reducing the technical and regulatory uncertainties for deploying new nuclear reactor technologies</a:t>
-            </a:r>
-          </a:p>
-        </p:txBody>
-      </p:sp>
-      <p:sp>
-        <p:nvSpPr>
-          <p:cNvPr id="4" name="Slide Number Placeholder 3">
-            <a:extLst>
-              <a:ext uri="{FF2B5EF4-FFF2-40B4-BE49-F238E27FC236}">
-                <a16:creationId xmlns:a16="http://schemas.microsoft.com/office/drawing/2014/main" id="{FFDF1B14-6BAE-C46B-6B26-8AF1C75205D0}"/>
+              <a:t>Small Nuclear Reactors</a:t>
+            </a:r>
+          </a:p>
+        </p:txBody>
+      </p:sp>
+      <p:pic>
+        <p:nvPicPr>
+          <p:cNvPr id="4" name="Picture 3" descr="Table of reactor information.">
+            <a:extLst>
+              <a:ext uri="{FF2B5EF4-FFF2-40B4-BE49-F238E27FC236}">
+                <a16:creationId xmlns:a16="http://schemas.microsoft.com/office/drawing/2014/main" id="{53FC065E-4EEC-6642-A897-940A49955B35}"/>
+              </a:ext>
+            </a:extLst>
+          </p:cNvPr>
+          <p:cNvPicPr>
+            <a:picLocks noChangeAspect="1"/>
+          </p:cNvPicPr>
+          <p:nvPr/>
+        </p:nvPicPr>
+        <p:blipFill>
+          <a:blip r:embed="rId2" cstate="email">
+            <a:extLst>
+              <a:ext uri="{28A0092B-C50C-407E-A947-70E740481C1C}">
+                <a14:useLocalDpi xmlns:a14="http://schemas.microsoft.com/office/drawing/2010/main"/>
+              </a:ext>
+            </a:extLst>
+          </a:blip>
+          <a:stretch>
+            <a:fillRect/>
+          </a:stretch>
+        </p:blipFill>
+        <p:spPr>
+          <a:xfrm>
+            <a:off x="6632294" y="1968500"/>
+            <a:ext cx="5250566" cy="1610793"/>
+          </a:xfrm>
+          <a:prstGeom prst="rect">
+            <a:avLst/>
+          </a:prstGeom>
+        </p:spPr>
+      </p:pic>
+      <p:pic>
+        <p:nvPicPr>
+          <p:cNvPr id="5" name="Picture 4" descr="Table of reactor information.">
+            <a:extLst>
+              <a:ext uri="{FF2B5EF4-FFF2-40B4-BE49-F238E27FC236}">
+                <a16:creationId xmlns:a16="http://schemas.microsoft.com/office/drawing/2014/main" id="{EF07FBDA-8F5B-A448-B384-5D79F4B716F7}"/>
+              </a:ext>
+            </a:extLst>
+          </p:cNvPr>
+          <p:cNvPicPr>
+            <a:picLocks noChangeAspect="1"/>
+          </p:cNvPicPr>
+          <p:nvPr/>
+        </p:nvPicPr>
+        <p:blipFill>
+          <a:blip r:embed="rId3" cstate="email">
+            <a:extLst>
+              <a:ext uri="{28A0092B-C50C-407E-A947-70E740481C1C}">
+                <a14:useLocalDpi xmlns:a14="http://schemas.microsoft.com/office/drawing/2010/main"/>
+              </a:ext>
+            </a:extLst>
+          </a:blip>
+          <a:stretch>
+            <a:fillRect/>
+          </a:stretch>
+        </p:blipFill>
+        <p:spPr>
+          <a:xfrm>
+            <a:off x="609600" y="1945350"/>
+            <a:ext cx="5328213" cy="4267582"/>
+          </a:xfrm>
+          <a:prstGeom prst="rect">
+            <a:avLst/>
+          </a:prstGeom>
+        </p:spPr>
+      </p:pic>
+      <p:pic>
+        <p:nvPicPr>
+          <p:cNvPr id="6" name="Picture 5" descr="Table of reactor information.">
+            <a:extLst>
+              <a:ext uri="{FF2B5EF4-FFF2-40B4-BE49-F238E27FC236}">
+                <a16:creationId xmlns:a16="http://schemas.microsoft.com/office/drawing/2014/main" id="{C6FCA96E-0E25-F74F-B133-22B8892C17EA}"/>
+              </a:ext>
+            </a:extLst>
+          </p:cNvPr>
+          <p:cNvPicPr>
+            <a:picLocks noChangeAspect="1"/>
+          </p:cNvPicPr>
+          <p:nvPr/>
+        </p:nvPicPr>
+        <p:blipFill>
+          <a:blip r:embed="rId4" cstate="email">
+            <a:extLst>
+              <a:ext uri="{28A0092B-C50C-407E-A947-70E740481C1C}">
+                <a14:useLocalDpi xmlns:a14="http://schemas.microsoft.com/office/drawing/2010/main"/>
+              </a:ext>
+            </a:extLst>
+          </a:blip>
+          <a:stretch>
+            <a:fillRect/>
+          </a:stretch>
+        </p:blipFill>
+        <p:spPr>
+          <a:xfrm>
+            <a:off x="6632294" y="3625014"/>
+            <a:ext cx="4868602" cy="2681136"/>
+          </a:xfrm>
+          <a:prstGeom prst="rect">
+            <a:avLst/>
+          </a:prstGeom>
+        </p:spPr>
+      </p:pic>
+      <p:sp>
+        <p:nvSpPr>
+          <p:cNvPr id="3" name="Slide Number Placeholder 2">
+            <a:extLst>
+              <a:ext uri="{FF2B5EF4-FFF2-40B4-BE49-F238E27FC236}">
+                <a16:creationId xmlns:a16="http://schemas.microsoft.com/office/drawing/2014/main" id="{23BEE61F-126B-AF8F-6D6C-892034FF9B5C}"/>
               </a:ext>
             </a:extLst>
           </p:cNvPr>
@@ -8755,7 +8659,7 @@
     </p:spTree>
     <p:extLst>
       <p:ext uri="{BB962C8B-B14F-4D97-AF65-F5344CB8AC3E}">
-        <p14:creationId xmlns:p14="http://schemas.microsoft.com/office/powerpoint/2010/main" val="1397516009"/>
+        <p14:creationId xmlns:p14="http://schemas.microsoft.com/office/powerpoint/2010/main" val="3563952051"/>
       </p:ext>
     </p:extLst>
   </p:cSld>
@@ -8787,7 +8691,7 @@
           <p:cNvPr id="2" name="Title 1">
             <a:extLst>
               <a:ext uri="{FF2B5EF4-FFF2-40B4-BE49-F238E27FC236}">
-                <a16:creationId xmlns:a16="http://schemas.microsoft.com/office/drawing/2014/main" id="{2606F7CE-DDB6-B748-8CFF-FA5C8F85571E}"/>
+                <a16:creationId xmlns:a16="http://schemas.microsoft.com/office/drawing/2014/main" id="{D77A9FF5-3AB3-2D22-C68C-3E00A56A77C6}"/>
               </a:ext>
             </a:extLst>
           </p:cNvPr>
@@ -8805,7 +8709,7 @@
           <a:p>
             <a:r>
               <a:rPr lang="en-US" dirty="0"/>
-              <a:t>Advanced Reactors in This Course</a:t>
+              <a:t>DOE Push for Advanced Reactors</a:t>
             </a:r>
           </a:p>
         </p:txBody>
@@ -8815,7 +8719,7 @@
           <p:cNvPr id="3" name="Content Placeholder 2">
             <a:extLst>
               <a:ext uri="{FF2B5EF4-FFF2-40B4-BE49-F238E27FC236}">
-                <a16:creationId xmlns:a16="http://schemas.microsoft.com/office/drawing/2014/main" id="{73CE51DF-1CEC-EC47-9534-E608A43727A8}"/>
+                <a16:creationId xmlns:a16="http://schemas.microsoft.com/office/drawing/2014/main" id="{1B3003FF-87BC-C330-610C-756228C3A68B}"/>
               </a:ext>
             </a:extLst>
           </p:cNvPr>
@@ -8826,78 +8730,33 @@
             <p:ph idx="1"/>
           </p:nvPr>
         </p:nvSpPr>
-        <p:spPr>
-          <a:xfrm>
-            <a:off x="609600" y="1968500"/>
-            <a:ext cx="10972800" cy="4157664"/>
-          </a:xfrm>
-        </p:spPr>
-        <p:txBody>
-          <a:bodyPr/>
-          <a:lstStyle/>
-          <a:p>
-            <a:r>
-              <a:rPr lang="en-US" sz="2400" dirty="0"/>
-              <a:t>Generation IV or adjacent concepts:</a:t>
-            </a:r>
-          </a:p>
-          <a:p>
-            <a:pPr lvl="1"/>
+        <p:spPr/>
+        <p:txBody>
+          <a:bodyPr/>
+          <a:lstStyle/>
+          <a:p>
             <a:r>
               <a:rPr lang="en-US" sz="2000" dirty="0"/>
-              <a:t>Sodium-cooled fast reactors</a:t>
-            </a:r>
-          </a:p>
-          <a:p>
-            <a:pPr lvl="1"/>
+              <a:t>DOE is funding a lot of research into advanced reactor systems</a:t>
+            </a:r>
+          </a:p>
+          <a:p>
             <a:r>
               <a:rPr lang="en-US" sz="2000" dirty="0"/>
-              <a:t>Molten salt reactors (both salt-cooled and salt-fueled)</a:t>
-            </a:r>
-          </a:p>
-          <a:p>
-            <a:pPr lvl="1"/>
+              <a:t>The Advanced Reactor Demonstration Program (ARDP) seeks to rapidly develop advanced reactor concepts</a:t>
+            </a:r>
+          </a:p>
+          <a:p>
             <a:r>
               <a:rPr lang="en-US" sz="2000" dirty="0"/>
-              <a:t>Gas-cooled reactors</a:t>
-            </a:r>
-          </a:p>
-          <a:p>
-            <a:pPr lvl="1"/>
+              <a:t>The National Reactor Innovation Center (NRIC) supports the construction and demonstration of advanced reactor systems committed to demonstrating advanced reactors by the end of 2025</a:t>
+            </a:r>
+          </a:p>
+          <a:p>
             <a:r>
               <a:rPr lang="en-US" sz="2000" dirty="0"/>
-              <a:t>Lead-cooled reactors</a:t>
-            </a:r>
-          </a:p>
-          <a:p>
-            <a:pPr lvl="1"/>
-            <a:r>
-              <a:rPr lang="en-US" sz="2000" dirty="0"/>
-              <a:t>Research reactors</a:t>
-            </a:r>
-          </a:p>
-          <a:p>
-            <a:pPr lvl="1"/>
-            <a:r>
-              <a:rPr lang="en-US" sz="2000" dirty="0"/>
-              <a:t>Supercritical water-cooled reactors (if we have time)</a:t>
-            </a:r>
-          </a:p>
-          <a:p>
-            <a:r>
-              <a:rPr lang="en-US" sz="2400" dirty="0"/>
-              <a:t>Many of these concepts overlap with SMRs</a:t>
-            </a:r>
-          </a:p>
-          <a:p>
-            <a:r>
-              <a:rPr lang="en-US" sz="2400" dirty="0"/>
-              <a:t>Will not touch on traditional UO2 fuel in LWRs, but touch on basically everything else</a:t>
-            </a:r>
-          </a:p>
-          <a:p>
-            <a:pPr lvl="1"/>
-            <a:endParaRPr lang="en-US" sz="2400" dirty="0"/>
+              <a:t>The Office of Advanced Reactor Technologies (ART) sponsors research, development and deployment (RD&amp;D) activities, with a focus on advancing scientific understanding of these technologies, establishing an international network of user facilities for civil nuclear RD&amp;D, improving economic competitiveness, and reducing the technical and regulatory uncertainties for deploying new nuclear reactor technologies</a:t>
+            </a:r>
           </a:p>
         </p:txBody>
       </p:sp>
@@ -8906,7 +8765,7 @@
           <p:cNvPr id="4" name="Slide Number Placeholder 3">
             <a:extLst>
               <a:ext uri="{FF2B5EF4-FFF2-40B4-BE49-F238E27FC236}">
-                <a16:creationId xmlns:a16="http://schemas.microsoft.com/office/drawing/2014/main" id="{4286E993-FA47-AFD2-FC0B-E9D6AD5ECEE4}"/>
+                <a16:creationId xmlns:a16="http://schemas.microsoft.com/office/drawing/2014/main" id="{FFDF1B14-6BAE-C46B-6B26-8AF1C75205D0}"/>
               </a:ext>
             </a:extLst>
           </p:cNvPr>
@@ -8939,7 +8798,7 @@
     </p:spTree>
     <p:extLst>
       <p:ext uri="{BB962C8B-B14F-4D97-AF65-F5344CB8AC3E}">
-        <p14:creationId xmlns:p14="http://schemas.microsoft.com/office/powerpoint/2010/main" val="56968922"/>
+        <p14:creationId xmlns:p14="http://schemas.microsoft.com/office/powerpoint/2010/main" val="1397516009"/>
       </p:ext>
     </p:extLst>
   </p:cSld>
@@ -8971,7 +8830,7 @@
           <p:cNvPr id="2" name="Title 1">
             <a:extLst>
               <a:ext uri="{FF2B5EF4-FFF2-40B4-BE49-F238E27FC236}">
-                <a16:creationId xmlns:a16="http://schemas.microsoft.com/office/drawing/2014/main" id="{29297520-EFC3-6346-8C35-1817DC6451A3}"/>
+                <a16:creationId xmlns:a16="http://schemas.microsoft.com/office/drawing/2014/main" id="{2606F7CE-DDB6-B748-8CFF-FA5C8F85571E}"/>
               </a:ext>
             </a:extLst>
           </p:cNvPr>
@@ -8989,7 +8848,7 @@
           <a:p>
             <a:r>
               <a:rPr lang="en-US" dirty="0"/>
-              <a:t>Subject Matter</a:t>
+              <a:t>Advanced Reactors in This Course</a:t>
             </a:r>
           </a:p>
         </p:txBody>
@@ -8999,7 +8858,7 @@
           <p:cNvPr id="3" name="Content Placeholder 2">
             <a:extLst>
               <a:ext uri="{FF2B5EF4-FFF2-40B4-BE49-F238E27FC236}">
-                <a16:creationId xmlns:a16="http://schemas.microsoft.com/office/drawing/2014/main" id="{DD54E750-56FB-B64A-96F1-1A89BB30F130}"/>
+                <a16:creationId xmlns:a16="http://schemas.microsoft.com/office/drawing/2014/main" id="{73CE51DF-1CEC-EC47-9534-E608A43727A8}"/>
               </a:ext>
             </a:extLst>
           </p:cNvPr>
@@ -9010,29 +8869,78 @@
             <p:ph idx="1"/>
           </p:nvPr>
         </p:nvSpPr>
-        <p:spPr/>
-        <p:txBody>
-          <a:bodyPr>
-            <a:normAutofit/>
-          </a:bodyPr>
+        <p:spPr>
+          <a:xfrm>
+            <a:off x="609600" y="1968500"/>
+            <a:ext cx="10972800" cy="4157664"/>
+          </a:xfrm>
+        </p:spPr>
+        <p:txBody>
+          <a:bodyPr/>
           <a:lstStyle/>
           <a:p>
             <a:r>
               <a:rPr lang="en-US" sz="2400" dirty="0"/>
-              <a:t>Explore unique aspects of each reactor type</a:t>
+              <a:t>Generation IV or adjacent concepts:</a:t>
+            </a:r>
+          </a:p>
+          <a:p>
+            <a:pPr lvl="1"/>
+            <a:r>
+              <a:rPr lang="en-US" sz="2000" dirty="0"/>
+              <a:t>Sodium-cooled fast reactors</a:t>
+            </a:r>
+          </a:p>
+          <a:p>
+            <a:pPr lvl="1"/>
+            <a:r>
+              <a:rPr lang="en-US" sz="2000" dirty="0"/>
+              <a:t>Molten salt reactors (both salt-cooled and salt-fueled)</a:t>
+            </a:r>
+          </a:p>
+          <a:p>
+            <a:pPr lvl="1"/>
+            <a:r>
+              <a:rPr lang="en-US" sz="2000" dirty="0"/>
+              <a:t>Gas-cooled reactors</a:t>
+            </a:r>
+          </a:p>
+          <a:p>
+            <a:pPr lvl="1"/>
+            <a:r>
+              <a:rPr lang="en-US" sz="2000" dirty="0"/>
+              <a:t>Lead-cooled reactors</a:t>
+            </a:r>
+          </a:p>
+          <a:p>
+            <a:pPr lvl="1"/>
+            <a:r>
+              <a:rPr lang="en-US" sz="2000" dirty="0"/>
+              <a:t>Research reactors</a:t>
+            </a:r>
+          </a:p>
+          <a:p>
+            <a:pPr lvl="1"/>
+            <a:r>
+              <a:rPr lang="en-US" sz="2000" dirty="0"/>
+              <a:t>Supercritical water-cooled reactors (if we have time)</a:t>
             </a:r>
           </a:p>
           <a:p>
             <a:r>
               <a:rPr lang="en-US" sz="2400" dirty="0"/>
-              <a:t>Identify fuel and cladding materials relevant to each reactor design, with a general emphasis on fuels, but will still cover advanced cladding materials and related materials phenomena</a:t>
-            </a:r>
-          </a:p>
-          <a:p>
-            <a:r>
-              <a:rPr lang="en-US" sz="2400" b="1" dirty="0"/>
-              <a:t>Explore materials challenges and materials phenomena impacting the performance, deployment, and lifetime of advanced reactors </a:t>
-            </a:r>
+              <a:t>Many of these concepts overlap with SMRs</a:t>
+            </a:r>
+          </a:p>
+          <a:p>
+            <a:r>
+              <a:rPr lang="en-US" sz="2400" dirty="0"/>
+              <a:t>Will not touch on traditional UO2 fuel in LWRs, but touch on basically everything else</a:t>
+            </a:r>
+          </a:p>
+          <a:p>
+            <a:pPr lvl="1"/>
+            <a:endParaRPr lang="en-US" sz="2400" dirty="0"/>
           </a:p>
         </p:txBody>
       </p:sp>
@@ -9041,7 +8949,7 @@
           <p:cNvPr id="4" name="Slide Number Placeholder 3">
             <a:extLst>
               <a:ext uri="{FF2B5EF4-FFF2-40B4-BE49-F238E27FC236}">
-                <a16:creationId xmlns:a16="http://schemas.microsoft.com/office/drawing/2014/main" id="{507D3D8B-5E78-69FB-8209-A7A0F1CA4B70}"/>
+                <a16:creationId xmlns:a16="http://schemas.microsoft.com/office/drawing/2014/main" id="{4286E993-FA47-AFD2-FC0B-E9D6AD5ECEE4}"/>
               </a:ext>
             </a:extLst>
           </p:cNvPr>
@@ -9074,7 +8982,7 @@
     </p:spTree>
     <p:extLst>
       <p:ext uri="{BB962C8B-B14F-4D97-AF65-F5344CB8AC3E}">
-        <p14:creationId xmlns:p14="http://schemas.microsoft.com/office/powerpoint/2010/main" val="3776802651"/>
+        <p14:creationId xmlns:p14="http://schemas.microsoft.com/office/powerpoint/2010/main" val="56968922"/>
       </p:ext>
     </p:extLst>
   </p:cSld>
@@ -9169,26 +9077,20 @@
           <a:p>
             <a:r>
               <a:rPr lang="en-US" sz="2400" dirty="0"/>
-              <a:t>Lectures will be posted after the class (will try to get them posted before)</a:t>
-            </a:r>
-          </a:p>
-          <a:p>
-            <a:r>
-              <a:rPr lang="en-US" sz="2400" dirty="0"/>
-              <a:t>Also made a google group: </a:t>
-            </a:r>
-            <a:r>
-              <a:rPr lang="en-US" sz="2400" dirty="0">
-                <a:hlinkClick r:id="rId2"/>
-              </a:rPr>
-              <a:t>https://groups.google.com/a/wolfware.ncsu.edu/g/ne763-fall-2025-everyone</a:t>
-            </a:r>
-            <a:endParaRPr lang="en-US" sz="2400" dirty="0"/>
+              <a:t>Lectures will be posted after the class</a:t>
+            </a:r>
           </a:p>
           <a:p>
             <a:r>
               <a:rPr lang="en-US" sz="2400" dirty="0"/>
               <a:t>Have also made a class slack channel for quick communication</a:t>
+            </a:r>
+          </a:p>
+          <a:p>
+            <a:pPr lvl="1"/>
+            <a:r>
+              <a:rPr lang="en-US" sz="2400" dirty="0"/>
+              <a:t>everyone should have either received an invite, or already has access</a:t>
             </a:r>
           </a:p>
         </p:txBody>
@@ -9263,6 +9165,280 @@
           <p:cNvPr id="2" name="Title 1">
             <a:extLst>
               <a:ext uri="{FF2B5EF4-FFF2-40B4-BE49-F238E27FC236}">
+                <a16:creationId xmlns:a16="http://schemas.microsoft.com/office/drawing/2014/main" id="{29297520-EFC3-6346-8C35-1817DC6451A3}"/>
+              </a:ext>
+            </a:extLst>
+          </p:cNvPr>
+          <p:cNvSpPr>
+            <a:spLocks noGrp="1"/>
+          </p:cNvSpPr>
+          <p:nvPr>
+            <p:ph type="title"/>
+          </p:nvPr>
+        </p:nvSpPr>
+        <p:spPr/>
+        <p:txBody>
+          <a:bodyPr/>
+          <a:lstStyle/>
+          <a:p>
+            <a:r>
+              <a:rPr lang="en-US" dirty="0"/>
+              <a:t>Subject Matter</a:t>
+            </a:r>
+          </a:p>
+        </p:txBody>
+      </p:sp>
+      <p:sp>
+        <p:nvSpPr>
+          <p:cNvPr id="3" name="Content Placeholder 2">
+            <a:extLst>
+              <a:ext uri="{FF2B5EF4-FFF2-40B4-BE49-F238E27FC236}">
+                <a16:creationId xmlns:a16="http://schemas.microsoft.com/office/drawing/2014/main" id="{DD54E750-56FB-B64A-96F1-1A89BB30F130}"/>
+              </a:ext>
+            </a:extLst>
+          </p:cNvPr>
+          <p:cNvSpPr>
+            <a:spLocks noGrp="1"/>
+          </p:cNvSpPr>
+          <p:nvPr>
+            <p:ph idx="1"/>
+          </p:nvPr>
+        </p:nvSpPr>
+        <p:spPr/>
+        <p:txBody>
+          <a:bodyPr>
+            <a:normAutofit/>
+          </a:bodyPr>
+          <a:lstStyle/>
+          <a:p>
+            <a:r>
+              <a:rPr lang="en-US" sz="2400" dirty="0"/>
+              <a:t>Explore unique aspects of each reactor type</a:t>
+            </a:r>
+          </a:p>
+          <a:p>
+            <a:r>
+              <a:rPr lang="en-US" sz="2400" dirty="0"/>
+              <a:t>Identify fuel and cladding materials relevant to each reactor design, with a general emphasis on fuels, but will still cover advanced cladding materials and related materials phenomena</a:t>
+            </a:r>
+          </a:p>
+          <a:p>
+            <a:r>
+              <a:rPr lang="en-US" sz="2400" b="1" dirty="0"/>
+              <a:t>Explore materials challenges and materials phenomena impacting the performance, deployment, and lifetime of advanced reactors </a:t>
+            </a:r>
+          </a:p>
+        </p:txBody>
+      </p:sp>
+      <p:sp>
+        <p:nvSpPr>
+          <p:cNvPr id="4" name="Slide Number Placeholder 3">
+            <a:extLst>
+              <a:ext uri="{FF2B5EF4-FFF2-40B4-BE49-F238E27FC236}">
+                <a16:creationId xmlns:a16="http://schemas.microsoft.com/office/drawing/2014/main" id="{507D3D8B-5E78-69FB-8209-A7A0F1CA4B70}"/>
+              </a:ext>
+            </a:extLst>
+          </p:cNvPr>
+          <p:cNvSpPr>
+            <a:spLocks noGrp="1"/>
+          </p:cNvSpPr>
+          <p:nvPr>
+            <p:ph type="sldNum" sz="quarter" idx="12"/>
+          </p:nvPr>
+        </p:nvSpPr>
+        <p:spPr/>
+        <p:txBody>
+          <a:bodyPr/>
+          <a:lstStyle/>
+          <a:p>
+            <a:pPr>
+              <a:defRPr/>
+            </a:pPr>
+            <a:fld id="{3FF2C605-4958-CF43-AA48-80339EFDB0AF}" type="slidenum">
+              <a:rPr lang="en-US" smtClean="0"/>
+              <a:pPr>
+                <a:defRPr/>
+              </a:pPr>
+              <a:t>20</a:t>
+            </a:fld>
+            <a:endParaRPr lang="en-US"/>
+          </a:p>
+        </p:txBody>
+      </p:sp>
+    </p:spTree>
+    <p:extLst>
+      <p:ext uri="{BB962C8B-B14F-4D97-AF65-F5344CB8AC3E}">
+        <p14:creationId xmlns:p14="http://schemas.microsoft.com/office/powerpoint/2010/main" val="3776802651"/>
+      </p:ext>
+    </p:extLst>
+  </p:cSld>
+  <p:clrMapOvr>
+    <a:masterClrMapping/>
+  </p:clrMapOvr>
+</p:sld>
+</file>
+
+<file path=ppt/slides/slide21.xml><?xml version="1.0" encoding="utf-8"?>
+<p:sld xmlns:a="http://schemas.openxmlformats.org/drawingml/2006/main" xmlns:r="http://schemas.openxmlformats.org/officeDocument/2006/relationships" xmlns:p="http://schemas.openxmlformats.org/presentationml/2006/main">
+  <p:cSld>
+    <p:spTree>
+      <p:nvGrpSpPr>
+        <p:cNvPr id="1" name=""/>
+        <p:cNvGrpSpPr/>
+        <p:nvPr/>
+      </p:nvGrpSpPr>
+      <p:grpSpPr>
+        <a:xfrm>
+          <a:off x="0" y="0"/>
+          <a:ext cx="0" cy="0"/>
+          <a:chOff x="0" y="0"/>
+          <a:chExt cx="0" cy="0"/>
+        </a:xfrm>
+      </p:grpSpPr>
+      <p:sp>
+        <p:nvSpPr>
+          <p:cNvPr id="2" name="Title 1">
+            <a:extLst>
+              <a:ext uri="{FF2B5EF4-FFF2-40B4-BE49-F238E27FC236}">
+                <a16:creationId xmlns:a16="http://schemas.microsoft.com/office/drawing/2014/main" id="{FF3073B9-D487-17DA-4D14-EEB1EE4D8BB1}"/>
+              </a:ext>
+            </a:extLst>
+          </p:cNvPr>
+          <p:cNvSpPr>
+            <a:spLocks noGrp="1"/>
+          </p:cNvSpPr>
+          <p:nvPr>
+            <p:ph type="title"/>
+          </p:nvPr>
+        </p:nvSpPr>
+        <p:spPr/>
+        <p:txBody>
+          <a:bodyPr/>
+          <a:lstStyle/>
+          <a:p>
+            <a:r>
+              <a:rPr lang="en-US" dirty="0"/>
+              <a:t>First assignment</a:t>
+            </a:r>
+          </a:p>
+        </p:txBody>
+      </p:sp>
+      <p:sp>
+        <p:nvSpPr>
+          <p:cNvPr id="3" name="Content Placeholder 2">
+            <a:extLst>
+              <a:ext uri="{FF2B5EF4-FFF2-40B4-BE49-F238E27FC236}">
+                <a16:creationId xmlns:a16="http://schemas.microsoft.com/office/drawing/2014/main" id="{B20613F0-EFFB-B43E-2913-DA62131BCA48}"/>
+              </a:ext>
+            </a:extLst>
+          </p:cNvPr>
+          <p:cNvSpPr>
+            <a:spLocks noGrp="1"/>
+          </p:cNvSpPr>
+          <p:nvPr>
+            <p:ph idx="1"/>
+          </p:nvPr>
+        </p:nvSpPr>
+        <p:spPr/>
+        <p:txBody>
+          <a:bodyPr/>
+          <a:lstStyle/>
+          <a:p>
+            <a:r>
+              <a:rPr lang="en-US" sz="2400" dirty="0"/>
+              <a:t>Who am I forum on </a:t>
+            </a:r>
+            <a:r>
+              <a:rPr lang="en-US" sz="2400" dirty="0" err="1"/>
+              <a:t>moodle</a:t>
+            </a:r>
+            <a:endParaRPr lang="en-US" sz="2400" dirty="0"/>
+          </a:p>
+          <a:p>
+            <a:r>
+              <a:rPr lang="en-US" sz="2400" dirty="0"/>
+              <a:t>Complete this, and you get a +3 on your first exam grade</a:t>
+            </a:r>
+          </a:p>
+          <a:p>
+            <a:pPr lvl="1"/>
+            <a:r>
+              <a:rPr lang="en-US" sz="2400" dirty="0"/>
+              <a:t>free points, you're welcome</a:t>
+            </a:r>
+          </a:p>
+        </p:txBody>
+      </p:sp>
+      <p:sp>
+        <p:nvSpPr>
+          <p:cNvPr id="4" name="Slide Number Placeholder 3">
+            <a:extLst>
+              <a:ext uri="{FF2B5EF4-FFF2-40B4-BE49-F238E27FC236}">
+                <a16:creationId xmlns:a16="http://schemas.microsoft.com/office/drawing/2014/main" id="{D577013A-D946-FEEF-BF95-7AAA5CA2612F}"/>
+              </a:ext>
+            </a:extLst>
+          </p:cNvPr>
+          <p:cNvSpPr>
+            <a:spLocks noGrp="1"/>
+          </p:cNvSpPr>
+          <p:nvPr>
+            <p:ph type="sldNum" sz="quarter" idx="12"/>
+          </p:nvPr>
+        </p:nvSpPr>
+        <p:spPr/>
+        <p:txBody>
+          <a:bodyPr/>
+          <a:lstStyle/>
+          <a:p>
+            <a:pPr>
+              <a:defRPr/>
+            </a:pPr>
+            <a:fld id="{3FF2C605-4958-CF43-AA48-80339EFDB0AF}" type="slidenum">
+              <a:rPr lang="en-US" smtClean="0"/>
+              <a:pPr>
+                <a:defRPr/>
+              </a:pPr>
+              <a:t>21</a:t>
+            </a:fld>
+            <a:endParaRPr lang="en-US"/>
+          </a:p>
+        </p:txBody>
+      </p:sp>
+    </p:spTree>
+    <p:extLst>
+      <p:ext uri="{BB962C8B-B14F-4D97-AF65-F5344CB8AC3E}">
+        <p14:creationId xmlns:p14="http://schemas.microsoft.com/office/powerpoint/2010/main" val="3905681729"/>
+      </p:ext>
+    </p:extLst>
+  </p:cSld>
+  <p:clrMapOvr>
+    <a:masterClrMapping/>
+  </p:clrMapOvr>
+</p:sld>
+</file>
+
+<file path=ppt/slides/slide22.xml><?xml version="1.0" encoding="utf-8"?>
+<p:sld xmlns:a="http://schemas.openxmlformats.org/drawingml/2006/main" xmlns:r="http://schemas.openxmlformats.org/officeDocument/2006/relationships" xmlns:p="http://schemas.openxmlformats.org/presentationml/2006/main">
+  <p:cSld>
+    <p:spTree>
+      <p:nvGrpSpPr>
+        <p:cNvPr id="1" name=""/>
+        <p:cNvGrpSpPr/>
+        <p:nvPr/>
+      </p:nvGrpSpPr>
+      <p:grpSpPr>
+        <a:xfrm>
+          <a:off x="0" y="0"/>
+          <a:ext cx="0" cy="0"/>
+          <a:chOff x="0" y="0"/>
+          <a:chExt cx="0" cy="0"/>
+        </a:xfrm>
+      </p:grpSpPr>
+      <p:sp>
+        <p:nvSpPr>
+          <p:cNvPr id="2" name="Title 1">
+            <a:extLst>
+              <a:ext uri="{FF2B5EF4-FFF2-40B4-BE49-F238E27FC236}">
                 <a16:creationId xmlns:a16="http://schemas.microsoft.com/office/drawing/2014/main" id="{93BFF56A-496A-2047-ADE5-CCF8BA98C8AD}"/>
               </a:ext>
             </a:extLst>
@@ -9315,7 +9491,7 @@
               <a:pPr>
                 <a:defRPr/>
               </a:pPr>
-              <a:t>20</a:t>
+              <a:t>22</a:t>
             </a:fld>
             <a:endParaRPr lang="en-US"/>
           </a:p>
@@ -9556,7 +9732,15 @@
           <a:p>
             <a:r>
               <a:rPr lang="en-US" sz="2400" dirty="0"/>
-              <a:t>Using the standard NCSU +/- grading system, as broken down in the syllabus</a:t>
+              <a:t>Using the standard NCSU +/- grading system, as broken down in the syllabus (which is on the </a:t>
+            </a:r>
+            <a:r>
+              <a:rPr lang="en-US" sz="2400" dirty="0" err="1"/>
+              <a:t>moodle</a:t>
+            </a:r>
+            <a:r>
+              <a:rPr lang="en-US" sz="2400" dirty="0"/>
+              <a:t>)</a:t>
             </a:r>
           </a:p>
           <a:p>
@@ -9713,7 +9897,7 @@
           <a:p>
             <a:r>
               <a:rPr lang="en-US" sz="2400" dirty="0"/>
-              <a:t>Set for Tuesdays 9:00-10:00 am</a:t>
+              <a:t>Set for Wednesdays 9:00-10:00 am, my office is BU 1110c</a:t>
             </a:r>
           </a:p>
           <a:p>
@@ -9861,7 +10045,7 @@
           <a:p>
             <a:r>
               <a:rPr lang="en-US" sz="2400" dirty="0"/>
-              <a:t>I will be reaching out for feedback periodically throughout the semester (probably twice)</a:t>
+              <a:t>I will be reaching out for feedback periodically throughout the semester (probably once in the middle, once in the end)</a:t>
             </a:r>
           </a:p>
           <a:p>
@@ -10294,7 +10478,7 @@
             <a:pPr lvl="1"/>
             <a:r>
               <a:rPr lang="en-US" dirty="0"/>
-              <a:t>Other stuff, if we have time</a:t>
+              <a:t>Potentially other stuff, if we have time (probably wont…)</a:t>
             </a:r>
           </a:p>
           <a:p>
@@ -10417,15 +10601,43 @@
           <a:lstStyle/>
           <a:p>
             <a:r>
-              <a:rPr lang="en-US" dirty="0"/>
+              <a:rPr lang="en-US" sz="2400" dirty="0"/>
               <a:t>No official textbook</a:t>
             </a:r>
           </a:p>
           <a:p>
             <a:r>
-              <a:rPr lang="en-US" dirty="0"/>
+              <a:rPr lang="en-US" sz="2400" dirty="0"/>
               <a:t>I pull a lot of material from “Comprehensive Nuclear Materials”</a:t>
             </a:r>
+          </a:p>
+          <a:p>
+            <a:pPr lvl="1"/>
+            <a:r>
+              <a:rPr lang="en-US" sz="2400" dirty="0"/>
+              <a:t>two versions, info pulled from both</a:t>
+            </a:r>
+          </a:p>
+          <a:p>
+            <a:r>
+              <a:rPr lang="en-US" sz="2400" dirty="0"/>
+              <a:t>Can consult this online textbook for further references and potentially clarification</a:t>
+            </a:r>
+          </a:p>
+          <a:p>
+            <a:r>
+              <a:rPr lang="en-US" sz="2400" dirty="0"/>
+              <a:t>Other information pulled from review articles or my own knowledge/experience</a:t>
+            </a:r>
+          </a:p>
+          <a:p>
+            <a:endParaRPr lang="en-US" sz="2400" dirty="0"/>
+          </a:p>
+          <a:p>
+            <a:endParaRPr lang="en-US" sz="2400" dirty="0"/>
+          </a:p>
+          <a:p>
+            <a:endParaRPr lang="en-US" sz="2400" dirty="0"/>
           </a:p>
         </p:txBody>
       </p:sp>
@@ -10499,7 +10711,7 @@
           <p:cNvPr id="2" name="Title 1">
             <a:extLst>
               <a:ext uri="{FF2B5EF4-FFF2-40B4-BE49-F238E27FC236}">
-                <a16:creationId xmlns:a16="http://schemas.microsoft.com/office/drawing/2014/main" id="{297947CF-EAEA-5F40-93E5-30922295C42A}"/>
+                <a16:creationId xmlns:a16="http://schemas.microsoft.com/office/drawing/2014/main" id="{047F3D2A-5705-EE18-8273-EC454F95C45B}"/>
               </a:ext>
             </a:extLst>
           </p:cNvPr>
@@ -10517,17 +10729,63 @@
           <a:p>
             <a:r>
               <a:rPr lang="en-US" dirty="0"/>
-              <a:t>Advanced reactor systems</a:t>
-            </a:r>
-          </a:p>
-        </p:txBody>
-      </p:sp>
-      <p:sp>
-        <p:nvSpPr>
-          <p:cNvPr id="3" name="Slide Number Placeholder 2">
-            <a:extLst>
-              <a:ext uri="{FF2B5EF4-FFF2-40B4-BE49-F238E27FC236}">
-                <a16:creationId xmlns:a16="http://schemas.microsoft.com/office/drawing/2014/main" id="{1067FE7F-C23C-59CD-99A1-30E34970B84E}"/>
+              <a:t>This Class is Conceptual</a:t>
+            </a:r>
+          </a:p>
+        </p:txBody>
+      </p:sp>
+      <p:sp>
+        <p:nvSpPr>
+          <p:cNvPr id="3" name="Content Placeholder 2">
+            <a:extLst>
+              <a:ext uri="{FF2B5EF4-FFF2-40B4-BE49-F238E27FC236}">
+                <a16:creationId xmlns:a16="http://schemas.microsoft.com/office/drawing/2014/main" id="{678A223D-73A7-B532-85A2-C357C0D5C773}"/>
+              </a:ext>
+            </a:extLst>
+          </p:cNvPr>
+          <p:cNvSpPr>
+            <a:spLocks noGrp="1"/>
+          </p:cNvSpPr>
+          <p:nvPr>
+            <p:ph idx="1"/>
+          </p:nvPr>
+        </p:nvSpPr>
+        <p:spPr/>
+        <p:txBody>
+          <a:bodyPr/>
+          <a:lstStyle/>
+          <a:p>
+            <a:r>
+              <a:rPr lang="en-US" sz="2400" dirty="0"/>
+              <a:t>There are not going to be ‘work-through’ problems</a:t>
+            </a:r>
+          </a:p>
+          <a:p>
+            <a:r>
+              <a:rPr lang="en-US" sz="2400" dirty="0"/>
+              <a:t>I am going to talk through concepts, systems, phenomena, etc.</a:t>
+            </a:r>
+          </a:p>
+          <a:p>
+            <a:r>
+              <a:rPr lang="en-US" sz="2400" dirty="0"/>
+              <a:t>Thus, you should be asking a lot of questions as we go through</a:t>
+            </a:r>
+          </a:p>
+          <a:p>
+            <a:r>
+              <a:rPr lang="en-US" sz="2400" dirty="0"/>
+              <a:t>The class is improved by questions, and everyone’s understanding is improved if we talk, back-and-forth, through topics</a:t>
+            </a:r>
+          </a:p>
+        </p:txBody>
+      </p:sp>
+      <p:sp>
+        <p:nvSpPr>
+          <p:cNvPr id="4" name="Slide Number Placeholder 3">
+            <a:extLst>
+              <a:ext uri="{FF2B5EF4-FFF2-40B4-BE49-F238E27FC236}">
+                <a16:creationId xmlns:a16="http://schemas.microsoft.com/office/drawing/2014/main" id="{747AAEE2-B751-5BE5-7405-19CF26B4DF8F}"/>
               </a:ext>
             </a:extLst>
           </p:cNvPr>
@@ -10546,7 +10804,7 @@
             <a:pPr>
               <a:defRPr/>
             </a:pPr>
-            <a:fld id="{0DA6BD0F-ABBC-C14D-BC96-77BE126A748B}" type="slidenum">
+            <a:fld id="{3FF2C605-4958-CF43-AA48-80339EFDB0AF}" type="slidenum">
               <a:rPr lang="en-US" smtClean="0"/>
               <a:pPr>
                 <a:defRPr/>
@@ -10560,7 +10818,7 @@
     </p:spTree>
     <p:extLst>
       <p:ext uri="{BB962C8B-B14F-4D97-AF65-F5344CB8AC3E}">
-        <p14:creationId xmlns:p14="http://schemas.microsoft.com/office/powerpoint/2010/main" val="2813437046"/>
+        <p14:creationId xmlns:p14="http://schemas.microsoft.com/office/powerpoint/2010/main" val="3406040609"/>
       </p:ext>
     </p:extLst>
   </p:cSld>
